--- a/docs/meetings/TSAT_ESM_IT_Server_Migration_2026-10-20.pptx
+++ b/docs/meetings/TSAT_ESM_IT_Server_Migration_2026-10-20.pptx
@@ -10,6 +10,8 @@
     <p:sldId id="258" r:id="rId10"/>
     <p:sldId id="259" r:id="rId11"/>
     <p:sldId id="260" r:id="rId12"/>
+    <p:sldId id="261" r:id="rId13"/>
+    <p:sldId id="262" r:id="rId14"/>
   </p:sldIdLst>
   <p:sldSz cx="12191695" cy="6858000" type="screen4x3"/>
   <p:notesSz cx="6858000" cy="9144000"/>
@@ -742,6 +744,146 @@
 </file>
 
 <file path=ppt/notesSlides/notesSlide5.xml><?xml version="1.0" encoding="utf-8"?>
+<p:notes xmlns:a="http://schemas.openxmlformats.org/drawingml/2006/main" xmlns:p="http://schemas.openxmlformats.org/presentationml/2006/main" xmlns:r="http://schemas.openxmlformats.org/officeDocument/2006/relationships">
+  <p:cSld>
+    <p:spTree>
+      <p:nvGrpSpPr>
+        <p:cNvPr id="1" name=""/>
+        <p:cNvGrpSpPr/>
+        <p:nvPr/>
+      </p:nvGrpSpPr>
+      <p:grpSpPr>
+        <a:xfrm>
+          <a:off x="0" y="0"/>
+          <a:ext cx="0" cy="0"/>
+          <a:chOff x="0" y="0"/>
+          <a:chExt cx="0" cy="0"/>
+        </a:xfrm>
+      </p:grpSpPr>
+      <p:sp>
+        <p:nvSpPr>
+          <p:cNvPr id="2" name="Slide Image Placeholder 1"/>
+          <p:cNvSpPr>
+            <a:spLocks noGrp="1"/>
+          </p:cNvSpPr>
+          <p:nvPr>
+            <p:ph type="sldImg" idx="2"/>
+          </p:nvPr>
+        </p:nvSpPr>
+        <p:spPr/>
+      </p:sp>
+      <p:sp>
+        <p:nvSpPr>
+          <p:cNvPr id="3" name="Notes Placeholder 2"/>
+          <p:cNvSpPr>
+            <a:spLocks noGrp="1"/>
+          </p:cNvSpPr>
+          <p:nvPr>
+            <p:ph type="body" idx="3" sz="quarter"/>
+          </p:nvPr>
+        </p:nvSpPr>
+        <p:spPr/>
+        <p:txBody>
+          <a:bodyPr/>
+          <a:lstStyle/>
+          <a:p>
+            <a:r>
+              <a:t>ภาพปลายทาง: ทุกโรงงานในกลุ่มต่อเข้าศูนย์กลางเดียวที่ INET ใช้โปรแกรมชุดเดียวกัน ข้อมูลแต่ละบริษัทแยกด้วยรหัสบริษัท (company_id) ผู้บริหารกลุ่มดูรวมได้จากจอ OBEYA/Group Overview  PC จอ TV และกล่อง Edge ต่อผ่าน VPN ระหว่างไซต์ มือถือเข้าผ่าน Cloudflare + ล็อกอินบัญชี M365 ตัวเดียวกับอีเมล ศูนย์กลางควรเป็น 3 เครื่อง ไม่ใช่เครื่องเดียว เพราะถ้าล่มจะหยุดทุกโรงงานพร้อมกัน และต้องมี backup นอกไซต์  ข้อยกเว้น: ถ้าประเทศไหนกฎหมายบังคับให้ข้อมูลอยู่ในประเทศ ค่อยแยกชุดให้โรงงานนั้น</a:t>
+            </a:r>
+          </a:p>
+        </p:txBody>
+      </p:sp>
+      <p:sp>
+        <p:nvSpPr>
+          <p:cNvPr id="4" name="Slide Number Placeholder 3"/>
+          <p:cNvSpPr>
+            <a:spLocks noGrp="1"/>
+          </p:cNvSpPr>
+          <p:nvPr>
+            <p:ph type="sldNum" idx="5" sz="quarter"/>
+          </p:nvPr>
+        </p:nvSpPr>
+        <p:spPr/>
+      </p:sp>
+    </p:spTree>
+  </p:cSld>
+  <p:clrMapOvr>
+    <a:masterClrMapping/>
+  </p:clrMapOvr>
+</p:notes>
+</file>
+
+<file path=ppt/notesSlides/notesSlide6.xml><?xml version="1.0" encoding="utf-8"?>
+<p:notes xmlns:a="http://schemas.openxmlformats.org/drawingml/2006/main" xmlns:p="http://schemas.openxmlformats.org/presentationml/2006/main" xmlns:r="http://schemas.openxmlformats.org/officeDocument/2006/relationships">
+  <p:cSld>
+    <p:spTree>
+      <p:nvGrpSpPr>
+        <p:cNvPr id="1" name=""/>
+        <p:cNvGrpSpPr/>
+        <p:nvPr/>
+      </p:nvGrpSpPr>
+      <p:grpSpPr>
+        <a:xfrm>
+          <a:off x="0" y="0"/>
+          <a:ext cx="0" cy="0"/>
+          <a:chOff x="0" y="0"/>
+          <a:chExt cx="0" cy="0"/>
+        </a:xfrm>
+      </p:grpSpPr>
+      <p:sp>
+        <p:nvSpPr>
+          <p:cNvPr id="2" name="Slide Image Placeholder 1"/>
+          <p:cNvSpPr>
+            <a:spLocks noGrp="1"/>
+          </p:cNvSpPr>
+          <p:nvPr>
+            <p:ph type="sldImg" idx="2"/>
+          </p:nvPr>
+        </p:nvSpPr>
+        <p:spPr/>
+      </p:sp>
+      <p:sp>
+        <p:nvSpPr>
+          <p:cNvPr id="3" name="Notes Placeholder 2"/>
+          <p:cNvSpPr>
+            <a:spLocks noGrp="1"/>
+          </p:cNvSpPr>
+          <p:nvPr>
+            <p:ph type="body" idx="3" sz="quarter"/>
+          </p:nvPr>
+        </p:nvSpPr>
+        <p:spPr/>
+        <p:txBody>
+          <a:bodyPr/>
+          <a:lstStyle/>
+          <a:p>
+            <a:r>
+              <a:t>ไม่ต้องรอทำทุกอย่างพร้อมกัน ขั้น 1 คือย้าย TSAT4 ตามผังที่ไอทีเสนอ ขั้น 2 คืองานฝั่งโปรแกรมให้รองรับหลายบริษัท ข้อนี้สำคัญ: ตอนนี้ฐานข้อมูล DR ไม่ผูกกับการล็อกอิน ถ้าเอาหลายบริษัทมาอยู่ฐานเดียวโดยไม่แก้ บริษัทหนึ่งจะเห็นข้อมูลอีกบริษัท ขั้น 3 ค่อยรับโรงงานนำร่อง ส่วนล่างบอกว่าอะไรใช้ร่วม อะไรแยก  ระบบออกแบบไว้รองรับแล้ว (ผังองค์กรเพิ่มชั้นบริษัทได้ ตารางรายวันไม่ต้องแก้ เพราะรู้บริษัทจากไลน์)</a:t>
+            </a:r>
+          </a:p>
+        </p:txBody>
+      </p:sp>
+      <p:sp>
+        <p:nvSpPr>
+          <p:cNvPr id="4" name="Slide Number Placeholder 3"/>
+          <p:cNvSpPr>
+            <a:spLocks noGrp="1"/>
+          </p:cNvSpPr>
+          <p:nvPr>
+            <p:ph type="sldNum" idx="5" sz="quarter"/>
+          </p:nvPr>
+        </p:nvSpPr>
+        <p:spPr/>
+      </p:sp>
+    </p:spTree>
+  </p:cSld>
+  <p:clrMapOvr>
+    <a:masterClrMapping/>
+  </p:clrMapOvr>
+</p:notes>
+</file>
+
+<file path=ppt/notesSlides/notesSlide7.xml><?xml version="1.0" encoding="utf-8"?>
 <p:notes xmlns:a="http://schemas.openxmlformats.org/drawingml/2006/main" xmlns:p="http://schemas.openxmlformats.org/presentationml/2006/main" xmlns:r="http://schemas.openxmlformats.org/officeDocument/2006/relationships">
   <p:cSld>
     <p:spTree>
@@ -8632,14 +8774,56 @@
                 </a:solidFill>
                 <a:latin typeface="Tahoma"/>
               </a:rPr>
-              <a:t>ขอคำตอบจากไอที + ขั้นต่อไป</a:t>
+              <a:t>ภาพเมื่อขยายไปหลายโรงงานในกลุ่ม</a:t>
+            </a:r>
+          </a:p>
+        </p:txBody>
+      </p:sp>
+      <p:sp>
+        <p:nvSpPr>
+          <p:cNvPr id="3" name="TextBox 2"/>
+          <p:cNvSpPr txBox="1"/>
+          <p:nvPr/>
+        </p:nvSpPr>
+        <p:spPr>
+          <a:xfrm>
+            <a:off x="384048" y="960120"/>
+            <a:ext cx="11247120" cy="402336"/>
+          </a:xfrm>
+          <a:prstGeom prst="rect">
+            <a:avLst/>
+          </a:prstGeom>
+          <a:noFill/>
+        </p:spPr>
+        <p:txBody>
+          <a:bodyPr wrap="square" anchor="t" lIns="27432" rIns="27432" tIns="9144" bIns="9144">
+            <a:spAutoFit/>
+          </a:bodyPr>
+          <a:lstStyle/>
+          <a:p>
+            <a:pPr algn="l">
+              <a:spcBef>
+                <a:spcPts val="0"/>
+              </a:spcBef>
+              <a:spcAft>
+                <a:spcPts val="200"/>
+              </a:spcAft>
+            </a:pPr>
+            <a:r>
+              <a:rPr sz="1500" b="1" i="0">
+                <a:solidFill>
+                  <a:srgbClr val="068734"/>
+                </a:solidFill>
+                <a:latin typeface="Tahoma"/>
+              </a:rPr>
+              <a:t>ศูนย์กลางเดียวที่ INET · ทุกโรงงานใช้โปรแกรมชุดเดียวกัน · ข้อมูลแยกกันด้วยรหัสบริษัท</a:t>
             </a:r>
           </a:p>
         </p:txBody>
       </p:sp>
       <p:pic>
         <p:nvPicPr>
-          <p:cNvPr id="3" name="Picture 2" descr="logo_r01.png"/>
+          <p:cNvPr id="4" name="Picture 3" descr="logo_r01.png"/>
           <p:cNvPicPr>
             <a:picLocks noChangeAspect="1"/>
           </p:cNvPicPr>
@@ -8663,7 +8847,7 @@
       </p:pic>
       <p:sp>
         <p:nvSpPr>
-          <p:cNvPr id="4" name="TextBox 3"/>
+          <p:cNvPr id="5" name="TextBox 4"/>
           <p:cNvSpPr txBox="1"/>
           <p:nvPr/>
         </p:nvSpPr>
@@ -8705,7 +8889,7 @@
       </p:sp>
       <p:sp>
         <p:nvSpPr>
-          <p:cNvPr id="5" name="TextBox 4"/>
+          <p:cNvPr id="6" name="TextBox 5"/>
           <p:cNvSpPr txBox="1"/>
           <p:nvPr/>
         </p:nvSpPr>
@@ -8747,14 +8931,418 @@
       </p:sp>
       <p:sp>
         <p:nvSpPr>
-          <p:cNvPr id="6" name="Rounded Rectangle 5"/>
+          <p:cNvPr id="7" name="TextBox 6"/>
+          <p:cNvSpPr txBox="1"/>
+          <p:nvPr/>
+        </p:nvSpPr>
+        <p:spPr>
+          <a:xfrm>
+            <a:off x="365760" y="1371600"/>
+            <a:ext cx="3291840" cy="320040"/>
+          </a:xfrm>
+          <a:prstGeom prst="rect">
+            <a:avLst/>
+          </a:prstGeom>
+          <a:noFill/>
+        </p:spPr>
+        <p:txBody>
+          <a:bodyPr wrap="square" anchor="t" lIns="27432" rIns="27432" tIns="9144" bIns="9144">
+            <a:spAutoFit/>
+          </a:bodyPr>
+          <a:lstStyle/>
+          <a:p>
+            <a:pPr algn="l">
+              <a:spcBef>
+                <a:spcPts val="0"/>
+              </a:spcBef>
+              <a:spcAft>
+                <a:spcPts val="200"/>
+              </a:spcAft>
+            </a:pPr>
+            <a:r>
+              <a:rPr sz="1400" b="1" i="0">
+                <a:solidFill>
+                  <a:srgbClr val="068734"/>
+                </a:solidFill>
+                <a:latin typeface="Tahoma"/>
+              </a:rPr>
+              <a:t>โรงงาน (เพิ่มได้เรื่อยๆ)</a:t>
+            </a:r>
+          </a:p>
+        </p:txBody>
+      </p:sp>
+      <p:sp>
+        <p:nvSpPr>
+          <p:cNvPr id="8" name="Rounded Rectangle 7"/>
           <p:cNvSpPr/>
           <p:nvPr/>
         </p:nvSpPr>
         <p:spPr>
           <a:xfrm>
-            <a:off x="457200" y="1463040"/>
-            <a:ext cx="6675120" cy="4434840"/>
+            <a:off x="365760" y="1737360"/>
+            <a:ext cx="3291840" cy="1188720"/>
+          </a:xfrm>
+          <a:prstGeom prst="roundRect">
+            <a:avLst/>
+          </a:prstGeom>
+          <a:solidFill>
+            <a:srgbClr val="FFFFFF"/>
+          </a:solidFill>
+          <a:ln w="25400">
+            <a:solidFill>
+              <a:srgbClr val="D95323"/>
+            </a:solidFill>
+          </a:ln>
+          <a:effectLst/>
+          <a:effectLst>
+            <a:outerShdw blurRad="50000" dist="20000" dir="5400000" rotWithShape="0">
+              <a:srgbClr val="8A99AD">
+                <a:alpha val="30000"/>
+              </a:srgbClr>
+            </a:outerShdw>
+          </a:effectLst>
+        </p:spPr>
+        <p:style>
+          <a:lnRef idx="1">
+            <a:schemeClr val="accent1"/>
+          </a:lnRef>
+          <a:fillRef idx="3">
+            <a:schemeClr val="accent1"/>
+          </a:fillRef>
+          <a:effectRef idx="2">
+            <a:schemeClr val="accent1"/>
+          </a:effectRef>
+          <a:fontRef idx="minor">
+            <a:schemeClr val="lt1"/>
+          </a:fontRef>
+        </p:style>
+        <p:txBody>
+          <a:bodyPr rtlCol="0" anchor="ctr"/>
+          <a:lstStyle/>
+          <a:p>
+            <a:pPr algn="ctr"/>
+          </a:p>
+        </p:txBody>
+      </p:sp>
+      <p:sp>
+        <p:nvSpPr>
+          <p:cNvPr id="9" name="TextBox 8"/>
+          <p:cNvSpPr txBox="1"/>
+          <p:nvPr/>
+        </p:nvSpPr>
+        <p:spPr>
+          <a:xfrm>
+            <a:off x="502920" y="1783080"/>
+            <a:ext cx="3017520" cy="411480"/>
+          </a:xfrm>
+          <a:prstGeom prst="rect">
+            <a:avLst/>
+          </a:prstGeom>
+          <a:noFill/>
+        </p:spPr>
+        <p:txBody>
+          <a:bodyPr wrap="square" anchor="ctr" lIns="27432" rIns="27432" tIns="9144" bIns="9144">
+            <a:spAutoFit/>
+          </a:bodyPr>
+          <a:lstStyle/>
+          <a:p>
+            <a:pPr algn="l">
+              <a:spcBef>
+                <a:spcPts val="0"/>
+              </a:spcBef>
+              <a:spcAft>
+                <a:spcPts val="200"/>
+              </a:spcAft>
+            </a:pPr>
+            <a:r>
+              <a:rPr sz="1400" b="1" i="0">
+                <a:solidFill>
+                  <a:srgbClr val="D95323"/>
+                </a:solidFill>
+                <a:latin typeface="Tahoma"/>
+              </a:rPr>
+              <a:t>TSAT4 (เรา)</a:t>
+            </a:r>
+            <a:r>
+              <a:rPr sz="1100" b="0" i="0">
+                <a:solidFill>
+                  <a:srgbClr val="555555"/>
+                </a:solidFill>
+                <a:latin typeface="Tahoma"/>
+              </a:rPr>
+              <a:t>  ใช้งานจริง</a:t>
+            </a:r>
+          </a:p>
+        </p:txBody>
+      </p:sp>
+      <p:sp>
+        <p:nvSpPr>
+          <p:cNvPr id="10" name="Rounded Rectangle 9"/>
+          <p:cNvSpPr/>
+          <p:nvPr/>
+        </p:nvSpPr>
+        <p:spPr>
+          <a:xfrm>
+            <a:off x="502920" y="2240280"/>
+            <a:ext cx="960120" cy="548640"/>
+          </a:xfrm>
+          <a:prstGeom prst="roundRect">
+            <a:avLst/>
+          </a:prstGeom>
+          <a:solidFill>
+            <a:srgbClr val="F2F2F2"/>
+          </a:solidFill>
+          <a:ln>
+            <a:noFill/>
+          </a:ln>
+          <a:effectLst/>
+        </p:spPr>
+        <p:style>
+          <a:lnRef idx="1">
+            <a:schemeClr val="accent1"/>
+          </a:lnRef>
+          <a:fillRef idx="3">
+            <a:schemeClr val="accent1"/>
+          </a:fillRef>
+          <a:effectRef idx="2">
+            <a:schemeClr val="accent1"/>
+          </a:effectRef>
+          <a:fontRef idx="minor">
+            <a:schemeClr val="lt1"/>
+          </a:fontRef>
+        </p:style>
+        <p:txBody>
+          <a:bodyPr rtlCol="0" anchor="ctr"/>
+          <a:lstStyle/>
+          <a:p>
+            <a:pPr algn="ctr"/>
+          </a:p>
+        </p:txBody>
+      </p:sp>
+      <p:sp>
+        <p:nvSpPr>
+          <p:cNvPr id="11" name="TextBox 10"/>
+          <p:cNvSpPr txBox="1"/>
+          <p:nvPr/>
+        </p:nvSpPr>
+        <p:spPr>
+          <a:xfrm>
+            <a:off x="502920" y="2240280"/>
+            <a:ext cx="960120" cy="548640"/>
+          </a:xfrm>
+          <a:prstGeom prst="rect">
+            <a:avLst/>
+          </a:prstGeom>
+          <a:noFill/>
+        </p:spPr>
+        <p:txBody>
+          <a:bodyPr wrap="square" anchor="ctr" lIns="27432" rIns="27432" tIns="9144" bIns="9144">
+            <a:spAutoFit/>
+          </a:bodyPr>
+          <a:lstStyle/>
+          <a:p>
+            <a:pPr algn="ctr">
+              <a:spcBef>
+                <a:spcPts val="0"/>
+              </a:spcBef>
+              <a:spcAft>
+                <a:spcPts val="200"/>
+              </a:spcAft>
+            </a:pPr>
+            <a:r>
+              <a:rPr sz="1100" b="1" i="0">
+                <a:solidFill>
+                  <a:srgbClr val="0D3D14"/>
+                </a:solidFill>
+                <a:latin typeface="Tahoma"/>
+              </a:rPr>
+              <a:t>PC · จอ TV</a:t>
+            </a:r>
+          </a:p>
+        </p:txBody>
+      </p:sp>
+      <p:sp>
+        <p:nvSpPr>
+          <p:cNvPr id="12" name="Rounded Rectangle 11"/>
+          <p:cNvSpPr/>
+          <p:nvPr/>
+        </p:nvSpPr>
+        <p:spPr>
+          <a:xfrm>
+            <a:off x="1554480" y="2240280"/>
+            <a:ext cx="960120" cy="548640"/>
+          </a:xfrm>
+          <a:prstGeom prst="roundRect">
+            <a:avLst/>
+          </a:prstGeom>
+          <a:solidFill>
+            <a:srgbClr val="F2F2F2"/>
+          </a:solidFill>
+          <a:ln>
+            <a:noFill/>
+          </a:ln>
+          <a:effectLst/>
+        </p:spPr>
+        <p:style>
+          <a:lnRef idx="1">
+            <a:schemeClr val="accent1"/>
+          </a:lnRef>
+          <a:fillRef idx="3">
+            <a:schemeClr val="accent1"/>
+          </a:fillRef>
+          <a:effectRef idx="2">
+            <a:schemeClr val="accent1"/>
+          </a:effectRef>
+          <a:fontRef idx="minor">
+            <a:schemeClr val="lt1"/>
+          </a:fontRef>
+        </p:style>
+        <p:txBody>
+          <a:bodyPr rtlCol="0" anchor="ctr"/>
+          <a:lstStyle/>
+          <a:p>
+            <a:pPr algn="ctr"/>
+          </a:p>
+        </p:txBody>
+      </p:sp>
+      <p:sp>
+        <p:nvSpPr>
+          <p:cNvPr id="13" name="TextBox 12"/>
+          <p:cNvSpPr txBox="1"/>
+          <p:nvPr/>
+        </p:nvSpPr>
+        <p:spPr>
+          <a:xfrm>
+            <a:off x="1554480" y="2240280"/>
+            <a:ext cx="960120" cy="548640"/>
+          </a:xfrm>
+          <a:prstGeom prst="rect">
+            <a:avLst/>
+          </a:prstGeom>
+          <a:noFill/>
+        </p:spPr>
+        <p:txBody>
+          <a:bodyPr wrap="square" anchor="ctr" lIns="27432" rIns="27432" tIns="9144" bIns="9144">
+            <a:spAutoFit/>
+          </a:bodyPr>
+          <a:lstStyle/>
+          <a:p>
+            <a:pPr algn="ctr">
+              <a:spcBef>
+                <a:spcPts val="0"/>
+              </a:spcBef>
+              <a:spcAft>
+                <a:spcPts val="200"/>
+              </a:spcAft>
+            </a:pPr>
+            <a:r>
+              <a:rPr sz="1100" b="1" i="0">
+                <a:solidFill>
+                  <a:srgbClr val="0D3D14"/>
+                </a:solidFill>
+                <a:latin typeface="Tahoma"/>
+              </a:rPr>
+              <a:t>มือถือ</a:t>
+            </a:r>
+          </a:p>
+        </p:txBody>
+      </p:sp>
+      <p:sp>
+        <p:nvSpPr>
+          <p:cNvPr id="14" name="Rounded Rectangle 13"/>
+          <p:cNvSpPr/>
+          <p:nvPr/>
+        </p:nvSpPr>
+        <p:spPr>
+          <a:xfrm>
+            <a:off x="2606039" y="2240280"/>
+            <a:ext cx="960120" cy="548640"/>
+          </a:xfrm>
+          <a:prstGeom prst="roundRect">
+            <a:avLst/>
+          </a:prstGeom>
+          <a:solidFill>
+            <a:srgbClr val="F2F2F2"/>
+          </a:solidFill>
+          <a:ln>
+            <a:noFill/>
+          </a:ln>
+          <a:effectLst/>
+        </p:spPr>
+        <p:style>
+          <a:lnRef idx="1">
+            <a:schemeClr val="accent1"/>
+          </a:lnRef>
+          <a:fillRef idx="3">
+            <a:schemeClr val="accent1"/>
+          </a:fillRef>
+          <a:effectRef idx="2">
+            <a:schemeClr val="accent1"/>
+          </a:effectRef>
+          <a:fontRef idx="minor">
+            <a:schemeClr val="lt1"/>
+          </a:fontRef>
+        </p:style>
+        <p:txBody>
+          <a:bodyPr rtlCol="0" anchor="ctr"/>
+          <a:lstStyle/>
+          <a:p>
+            <a:pPr algn="ctr"/>
+          </a:p>
+        </p:txBody>
+      </p:sp>
+      <p:sp>
+        <p:nvSpPr>
+          <p:cNvPr id="15" name="TextBox 14"/>
+          <p:cNvSpPr txBox="1"/>
+          <p:nvPr/>
+        </p:nvSpPr>
+        <p:spPr>
+          <a:xfrm>
+            <a:off x="2606039" y="2240280"/>
+            <a:ext cx="960120" cy="548640"/>
+          </a:xfrm>
+          <a:prstGeom prst="rect">
+            <a:avLst/>
+          </a:prstGeom>
+          <a:noFill/>
+        </p:spPr>
+        <p:txBody>
+          <a:bodyPr wrap="square" anchor="ctr" lIns="27432" rIns="27432" tIns="9144" bIns="9144">
+            <a:spAutoFit/>
+          </a:bodyPr>
+          <a:lstStyle/>
+          <a:p>
+            <a:pPr algn="ctr">
+              <a:spcBef>
+                <a:spcPts val="0"/>
+              </a:spcBef>
+              <a:spcAft>
+                <a:spcPts val="200"/>
+              </a:spcAft>
+            </a:pPr>
+            <a:r>
+              <a:rPr sz="1100" b="1" i="0">
+                <a:solidFill>
+                  <a:srgbClr val="0D3D14"/>
+                </a:solidFill>
+                <a:latin typeface="Tahoma"/>
+              </a:rPr>
+              <a:t>กล่อง Edge</a:t>
+            </a:r>
+          </a:p>
+        </p:txBody>
+      </p:sp>
+      <p:sp>
+        <p:nvSpPr>
+          <p:cNvPr id="16" name="Rounded Rectangle 15"/>
+          <p:cNvSpPr/>
+          <p:nvPr/>
+        </p:nvSpPr>
+        <p:spPr>
+          <a:xfrm>
+            <a:off x="365760" y="3063239"/>
+            <a:ext cx="3291840" cy="1188720"/>
           </a:xfrm>
           <a:prstGeom prst="roundRect">
             <a:avLst/>
@@ -8800,14 +9388,1233 @@
       </p:sp>
       <p:sp>
         <p:nvSpPr>
-          <p:cNvPr id="7" name="TextBox 6"/>
+          <p:cNvPr id="17" name="TextBox 16"/>
           <p:cNvSpPr txBox="1"/>
           <p:nvPr/>
         </p:nvSpPr>
         <p:spPr>
           <a:xfrm>
-            <a:off x="685800" y="1554480"/>
-            <a:ext cx="6309360" cy="411480"/>
+            <a:off x="502920" y="3108959"/>
+            <a:ext cx="3017520" cy="411480"/>
+          </a:xfrm>
+          <a:prstGeom prst="rect">
+            <a:avLst/>
+          </a:prstGeom>
+          <a:noFill/>
+        </p:spPr>
+        <p:txBody>
+          <a:bodyPr wrap="square" anchor="ctr" lIns="27432" rIns="27432" tIns="9144" bIns="9144">
+            <a:spAutoFit/>
+          </a:bodyPr>
+          <a:lstStyle/>
+          <a:p>
+            <a:pPr algn="l">
+              <a:spcBef>
+                <a:spcPts val="0"/>
+              </a:spcBef>
+              <a:spcAft>
+                <a:spcPts val="200"/>
+              </a:spcAft>
+            </a:pPr>
+            <a:r>
+              <a:rPr sz="1400" b="1" i="0">
+                <a:solidFill>
+                  <a:srgbClr val="0D3D14"/>
+                </a:solidFill>
+                <a:latin typeface="Tahoma"/>
+              </a:rPr>
+              <a:t>โรงงานในไทย</a:t>
+            </a:r>
+            <a:r>
+              <a:rPr sz="1100" b="0" i="0">
+                <a:solidFill>
+                  <a:srgbClr val="555555"/>
+                </a:solidFill>
+                <a:latin typeface="Tahoma"/>
+              </a:rPr>
+              <a:t>  TSAT1 · TSLA …</a:t>
+            </a:r>
+          </a:p>
+        </p:txBody>
+      </p:sp>
+      <p:sp>
+        <p:nvSpPr>
+          <p:cNvPr id="18" name="Rounded Rectangle 17"/>
+          <p:cNvSpPr/>
+          <p:nvPr/>
+        </p:nvSpPr>
+        <p:spPr>
+          <a:xfrm>
+            <a:off x="502920" y="3566159"/>
+            <a:ext cx="960120" cy="548640"/>
+          </a:xfrm>
+          <a:prstGeom prst="roundRect">
+            <a:avLst/>
+          </a:prstGeom>
+          <a:solidFill>
+            <a:srgbClr val="F2F2F2"/>
+          </a:solidFill>
+          <a:ln>
+            <a:noFill/>
+          </a:ln>
+          <a:effectLst/>
+        </p:spPr>
+        <p:style>
+          <a:lnRef idx="1">
+            <a:schemeClr val="accent1"/>
+          </a:lnRef>
+          <a:fillRef idx="3">
+            <a:schemeClr val="accent1"/>
+          </a:fillRef>
+          <a:effectRef idx="2">
+            <a:schemeClr val="accent1"/>
+          </a:effectRef>
+          <a:fontRef idx="minor">
+            <a:schemeClr val="lt1"/>
+          </a:fontRef>
+        </p:style>
+        <p:txBody>
+          <a:bodyPr rtlCol="0" anchor="ctr"/>
+          <a:lstStyle/>
+          <a:p>
+            <a:pPr algn="ctr"/>
+          </a:p>
+        </p:txBody>
+      </p:sp>
+      <p:sp>
+        <p:nvSpPr>
+          <p:cNvPr id="19" name="TextBox 18"/>
+          <p:cNvSpPr txBox="1"/>
+          <p:nvPr/>
+        </p:nvSpPr>
+        <p:spPr>
+          <a:xfrm>
+            <a:off x="502920" y="3566159"/>
+            <a:ext cx="960120" cy="548640"/>
+          </a:xfrm>
+          <a:prstGeom prst="rect">
+            <a:avLst/>
+          </a:prstGeom>
+          <a:noFill/>
+        </p:spPr>
+        <p:txBody>
+          <a:bodyPr wrap="square" anchor="ctr" lIns="27432" rIns="27432" tIns="9144" bIns="9144">
+            <a:spAutoFit/>
+          </a:bodyPr>
+          <a:lstStyle/>
+          <a:p>
+            <a:pPr algn="ctr">
+              <a:spcBef>
+                <a:spcPts val="0"/>
+              </a:spcBef>
+              <a:spcAft>
+                <a:spcPts val="200"/>
+              </a:spcAft>
+            </a:pPr>
+            <a:r>
+              <a:rPr sz="1100" b="1" i="0">
+                <a:solidFill>
+                  <a:srgbClr val="0D3D14"/>
+                </a:solidFill>
+                <a:latin typeface="Tahoma"/>
+              </a:rPr>
+              <a:t>PC · จอ TV</a:t>
+            </a:r>
+          </a:p>
+        </p:txBody>
+      </p:sp>
+      <p:sp>
+        <p:nvSpPr>
+          <p:cNvPr id="20" name="Rounded Rectangle 19"/>
+          <p:cNvSpPr/>
+          <p:nvPr/>
+        </p:nvSpPr>
+        <p:spPr>
+          <a:xfrm>
+            <a:off x="1554480" y="3566159"/>
+            <a:ext cx="960120" cy="548640"/>
+          </a:xfrm>
+          <a:prstGeom prst="roundRect">
+            <a:avLst/>
+          </a:prstGeom>
+          <a:solidFill>
+            <a:srgbClr val="F2F2F2"/>
+          </a:solidFill>
+          <a:ln>
+            <a:noFill/>
+          </a:ln>
+          <a:effectLst/>
+        </p:spPr>
+        <p:style>
+          <a:lnRef idx="1">
+            <a:schemeClr val="accent1"/>
+          </a:lnRef>
+          <a:fillRef idx="3">
+            <a:schemeClr val="accent1"/>
+          </a:fillRef>
+          <a:effectRef idx="2">
+            <a:schemeClr val="accent1"/>
+          </a:effectRef>
+          <a:fontRef idx="minor">
+            <a:schemeClr val="lt1"/>
+          </a:fontRef>
+        </p:style>
+        <p:txBody>
+          <a:bodyPr rtlCol="0" anchor="ctr"/>
+          <a:lstStyle/>
+          <a:p>
+            <a:pPr algn="ctr"/>
+          </a:p>
+        </p:txBody>
+      </p:sp>
+      <p:sp>
+        <p:nvSpPr>
+          <p:cNvPr id="21" name="TextBox 20"/>
+          <p:cNvSpPr txBox="1"/>
+          <p:nvPr/>
+        </p:nvSpPr>
+        <p:spPr>
+          <a:xfrm>
+            <a:off x="1554480" y="3566159"/>
+            <a:ext cx="960120" cy="548640"/>
+          </a:xfrm>
+          <a:prstGeom prst="rect">
+            <a:avLst/>
+          </a:prstGeom>
+          <a:noFill/>
+        </p:spPr>
+        <p:txBody>
+          <a:bodyPr wrap="square" anchor="ctr" lIns="27432" rIns="27432" tIns="9144" bIns="9144">
+            <a:spAutoFit/>
+          </a:bodyPr>
+          <a:lstStyle/>
+          <a:p>
+            <a:pPr algn="ctr">
+              <a:spcBef>
+                <a:spcPts val="0"/>
+              </a:spcBef>
+              <a:spcAft>
+                <a:spcPts val="200"/>
+              </a:spcAft>
+            </a:pPr>
+            <a:r>
+              <a:rPr sz="1100" b="1" i="0">
+                <a:solidFill>
+                  <a:srgbClr val="0D3D14"/>
+                </a:solidFill>
+                <a:latin typeface="Tahoma"/>
+              </a:rPr>
+              <a:t>มือถือ</a:t>
+            </a:r>
+          </a:p>
+        </p:txBody>
+      </p:sp>
+      <p:sp>
+        <p:nvSpPr>
+          <p:cNvPr id="22" name="Rounded Rectangle 21"/>
+          <p:cNvSpPr/>
+          <p:nvPr/>
+        </p:nvSpPr>
+        <p:spPr>
+          <a:xfrm>
+            <a:off x="2606039" y="3566159"/>
+            <a:ext cx="960120" cy="548640"/>
+          </a:xfrm>
+          <a:prstGeom prst="roundRect">
+            <a:avLst/>
+          </a:prstGeom>
+          <a:solidFill>
+            <a:srgbClr val="F2F2F2"/>
+          </a:solidFill>
+          <a:ln>
+            <a:noFill/>
+          </a:ln>
+          <a:effectLst/>
+        </p:spPr>
+        <p:style>
+          <a:lnRef idx="1">
+            <a:schemeClr val="accent1"/>
+          </a:lnRef>
+          <a:fillRef idx="3">
+            <a:schemeClr val="accent1"/>
+          </a:fillRef>
+          <a:effectRef idx="2">
+            <a:schemeClr val="accent1"/>
+          </a:effectRef>
+          <a:fontRef idx="minor">
+            <a:schemeClr val="lt1"/>
+          </a:fontRef>
+        </p:style>
+        <p:txBody>
+          <a:bodyPr rtlCol="0" anchor="ctr"/>
+          <a:lstStyle/>
+          <a:p>
+            <a:pPr algn="ctr"/>
+          </a:p>
+        </p:txBody>
+      </p:sp>
+      <p:sp>
+        <p:nvSpPr>
+          <p:cNvPr id="23" name="TextBox 22"/>
+          <p:cNvSpPr txBox="1"/>
+          <p:nvPr/>
+        </p:nvSpPr>
+        <p:spPr>
+          <a:xfrm>
+            <a:off x="2606039" y="3566159"/>
+            <a:ext cx="960120" cy="548640"/>
+          </a:xfrm>
+          <a:prstGeom prst="rect">
+            <a:avLst/>
+          </a:prstGeom>
+          <a:noFill/>
+        </p:spPr>
+        <p:txBody>
+          <a:bodyPr wrap="square" anchor="ctr" lIns="27432" rIns="27432" tIns="9144" bIns="9144">
+            <a:spAutoFit/>
+          </a:bodyPr>
+          <a:lstStyle/>
+          <a:p>
+            <a:pPr algn="ctr">
+              <a:spcBef>
+                <a:spcPts val="0"/>
+              </a:spcBef>
+              <a:spcAft>
+                <a:spcPts val="200"/>
+              </a:spcAft>
+            </a:pPr>
+            <a:r>
+              <a:rPr sz="1100" b="1" i="0">
+                <a:solidFill>
+                  <a:srgbClr val="0D3D14"/>
+                </a:solidFill>
+                <a:latin typeface="Tahoma"/>
+              </a:rPr>
+              <a:t>กล่อง Edge</a:t>
+            </a:r>
+          </a:p>
+        </p:txBody>
+      </p:sp>
+      <p:sp>
+        <p:nvSpPr>
+          <p:cNvPr id="24" name="Rounded Rectangle 23"/>
+          <p:cNvSpPr/>
+          <p:nvPr/>
+        </p:nvSpPr>
+        <p:spPr>
+          <a:xfrm>
+            <a:off x="365760" y="4389120"/>
+            <a:ext cx="3291840" cy="1188720"/>
+          </a:xfrm>
+          <a:prstGeom prst="roundRect">
+            <a:avLst/>
+          </a:prstGeom>
+          <a:solidFill>
+            <a:srgbClr val="FFFFFF"/>
+          </a:solidFill>
+          <a:ln w="9525">
+            <a:solidFill>
+              <a:srgbClr val="D9D9D9"/>
+            </a:solidFill>
+          </a:ln>
+          <a:effectLst/>
+          <a:effectLst>
+            <a:outerShdw blurRad="50000" dist="20000" dir="5400000" rotWithShape="0">
+              <a:srgbClr val="8A99AD">
+                <a:alpha val="30000"/>
+              </a:srgbClr>
+            </a:outerShdw>
+          </a:effectLst>
+        </p:spPr>
+        <p:style>
+          <a:lnRef idx="1">
+            <a:schemeClr val="accent1"/>
+          </a:lnRef>
+          <a:fillRef idx="3">
+            <a:schemeClr val="accent1"/>
+          </a:fillRef>
+          <a:effectRef idx="2">
+            <a:schemeClr val="accent1"/>
+          </a:effectRef>
+          <a:fontRef idx="minor">
+            <a:schemeClr val="lt1"/>
+          </a:fontRef>
+        </p:style>
+        <p:txBody>
+          <a:bodyPr rtlCol="0" anchor="ctr"/>
+          <a:lstStyle/>
+          <a:p>
+            <a:pPr algn="ctr"/>
+          </a:p>
+        </p:txBody>
+      </p:sp>
+      <p:sp>
+        <p:nvSpPr>
+          <p:cNvPr id="25" name="TextBox 24"/>
+          <p:cNvSpPr txBox="1"/>
+          <p:nvPr/>
+        </p:nvSpPr>
+        <p:spPr>
+          <a:xfrm>
+            <a:off x="502920" y="4434840"/>
+            <a:ext cx="3017520" cy="411480"/>
+          </a:xfrm>
+          <a:prstGeom prst="rect">
+            <a:avLst/>
+          </a:prstGeom>
+          <a:noFill/>
+        </p:spPr>
+        <p:txBody>
+          <a:bodyPr wrap="square" anchor="ctr" lIns="27432" rIns="27432" tIns="9144" bIns="9144">
+            <a:spAutoFit/>
+          </a:bodyPr>
+          <a:lstStyle/>
+          <a:p>
+            <a:pPr algn="l">
+              <a:spcBef>
+                <a:spcPts val="0"/>
+              </a:spcBef>
+              <a:spcAft>
+                <a:spcPts val="200"/>
+              </a:spcAft>
+            </a:pPr>
+            <a:r>
+              <a:rPr sz="1400" b="1" i="0">
+                <a:solidFill>
+                  <a:srgbClr val="0D3D14"/>
+                </a:solidFill>
+                <a:latin typeface="Tahoma"/>
+              </a:rPr>
+              <a:t>ต่างประเทศ</a:t>
+            </a:r>
+            <a:r>
+              <a:rPr sz="1100" b="0" i="0">
+                <a:solidFill>
+                  <a:srgbClr val="555555"/>
+                </a:solidFill>
+                <a:latin typeface="Tahoma"/>
+              </a:rPr>
+              <a:t>  เวียดนาม · อินเดีย …</a:t>
+            </a:r>
+          </a:p>
+        </p:txBody>
+      </p:sp>
+      <p:sp>
+        <p:nvSpPr>
+          <p:cNvPr id="26" name="Rounded Rectangle 25"/>
+          <p:cNvSpPr/>
+          <p:nvPr/>
+        </p:nvSpPr>
+        <p:spPr>
+          <a:xfrm>
+            <a:off x="502920" y="4892040"/>
+            <a:ext cx="960120" cy="548640"/>
+          </a:xfrm>
+          <a:prstGeom prst="roundRect">
+            <a:avLst/>
+          </a:prstGeom>
+          <a:solidFill>
+            <a:srgbClr val="F2F2F2"/>
+          </a:solidFill>
+          <a:ln>
+            <a:noFill/>
+          </a:ln>
+          <a:effectLst/>
+        </p:spPr>
+        <p:style>
+          <a:lnRef idx="1">
+            <a:schemeClr val="accent1"/>
+          </a:lnRef>
+          <a:fillRef idx="3">
+            <a:schemeClr val="accent1"/>
+          </a:fillRef>
+          <a:effectRef idx="2">
+            <a:schemeClr val="accent1"/>
+          </a:effectRef>
+          <a:fontRef idx="minor">
+            <a:schemeClr val="lt1"/>
+          </a:fontRef>
+        </p:style>
+        <p:txBody>
+          <a:bodyPr rtlCol="0" anchor="ctr"/>
+          <a:lstStyle/>
+          <a:p>
+            <a:pPr algn="ctr"/>
+          </a:p>
+        </p:txBody>
+      </p:sp>
+      <p:sp>
+        <p:nvSpPr>
+          <p:cNvPr id="27" name="TextBox 26"/>
+          <p:cNvSpPr txBox="1"/>
+          <p:nvPr/>
+        </p:nvSpPr>
+        <p:spPr>
+          <a:xfrm>
+            <a:off x="502920" y="4892040"/>
+            <a:ext cx="960120" cy="548640"/>
+          </a:xfrm>
+          <a:prstGeom prst="rect">
+            <a:avLst/>
+          </a:prstGeom>
+          <a:noFill/>
+        </p:spPr>
+        <p:txBody>
+          <a:bodyPr wrap="square" anchor="ctr" lIns="27432" rIns="27432" tIns="9144" bIns="9144">
+            <a:spAutoFit/>
+          </a:bodyPr>
+          <a:lstStyle/>
+          <a:p>
+            <a:pPr algn="ctr">
+              <a:spcBef>
+                <a:spcPts val="0"/>
+              </a:spcBef>
+              <a:spcAft>
+                <a:spcPts val="200"/>
+              </a:spcAft>
+            </a:pPr>
+            <a:r>
+              <a:rPr sz="1100" b="1" i="0">
+                <a:solidFill>
+                  <a:srgbClr val="0D3D14"/>
+                </a:solidFill>
+                <a:latin typeface="Tahoma"/>
+              </a:rPr>
+              <a:t>PC · จอ TV</a:t>
+            </a:r>
+          </a:p>
+        </p:txBody>
+      </p:sp>
+      <p:sp>
+        <p:nvSpPr>
+          <p:cNvPr id="28" name="Rounded Rectangle 27"/>
+          <p:cNvSpPr/>
+          <p:nvPr/>
+        </p:nvSpPr>
+        <p:spPr>
+          <a:xfrm>
+            <a:off x="1554480" y="4892040"/>
+            <a:ext cx="960120" cy="548640"/>
+          </a:xfrm>
+          <a:prstGeom prst="roundRect">
+            <a:avLst/>
+          </a:prstGeom>
+          <a:solidFill>
+            <a:srgbClr val="F2F2F2"/>
+          </a:solidFill>
+          <a:ln>
+            <a:noFill/>
+          </a:ln>
+          <a:effectLst/>
+        </p:spPr>
+        <p:style>
+          <a:lnRef idx="1">
+            <a:schemeClr val="accent1"/>
+          </a:lnRef>
+          <a:fillRef idx="3">
+            <a:schemeClr val="accent1"/>
+          </a:fillRef>
+          <a:effectRef idx="2">
+            <a:schemeClr val="accent1"/>
+          </a:effectRef>
+          <a:fontRef idx="minor">
+            <a:schemeClr val="lt1"/>
+          </a:fontRef>
+        </p:style>
+        <p:txBody>
+          <a:bodyPr rtlCol="0" anchor="ctr"/>
+          <a:lstStyle/>
+          <a:p>
+            <a:pPr algn="ctr"/>
+          </a:p>
+        </p:txBody>
+      </p:sp>
+      <p:sp>
+        <p:nvSpPr>
+          <p:cNvPr id="29" name="TextBox 28"/>
+          <p:cNvSpPr txBox="1"/>
+          <p:nvPr/>
+        </p:nvSpPr>
+        <p:spPr>
+          <a:xfrm>
+            <a:off x="1554480" y="4892040"/>
+            <a:ext cx="960120" cy="548640"/>
+          </a:xfrm>
+          <a:prstGeom prst="rect">
+            <a:avLst/>
+          </a:prstGeom>
+          <a:noFill/>
+        </p:spPr>
+        <p:txBody>
+          <a:bodyPr wrap="square" anchor="ctr" lIns="27432" rIns="27432" tIns="9144" bIns="9144">
+            <a:spAutoFit/>
+          </a:bodyPr>
+          <a:lstStyle/>
+          <a:p>
+            <a:pPr algn="ctr">
+              <a:spcBef>
+                <a:spcPts val="0"/>
+              </a:spcBef>
+              <a:spcAft>
+                <a:spcPts val="200"/>
+              </a:spcAft>
+            </a:pPr>
+            <a:r>
+              <a:rPr sz="1100" b="1" i="0">
+                <a:solidFill>
+                  <a:srgbClr val="0D3D14"/>
+                </a:solidFill>
+                <a:latin typeface="Tahoma"/>
+              </a:rPr>
+              <a:t>มือถือ</a:t>
+            </a:r>
+          </a:p>
+        </p:txBody>
+      </p:sp>
+      <p:sp>
+        <p:nvSpPr>
+          <p:cNvPr id="30" name="Rounded Rectangle 29"/>
+          <p:cNvSpPr/>
+          <p:nvPr/>
+        </p:nvSpPr>
+        <p:spPr>
+          <a:xfrm>
+            <a:off x="2606039" y="4892040"/>
+            <a:ext cx="960120" cy="548640"/>
+          </a:xfrm>
+          <a:prstGeom prst="roundRect">
+            <a:avLst/>
+          </a:prstGeom>
+          <a:solidFill>
+            <a:srgbClr val="F2F2F2"/>
+          </a:solidFill>
+          <a:ln>
+            <a:noFill/>
+          </a:ln>
+          <a:effectLst/>
+        </p:spPr>
+        <p:style>
+          <a:lnRef idx="1">
+            <a:schemeClr val="accent1"/>
+          </a:lnRef>
+          <a:fillRef idx="3">
+            <a:schemeClr val="accent1"/>
+          </a:fillRef>
+          <a:effectRef idx="2">
+            <a:schemeClr val="accent1"/>
+          </a:effectRef>
+          <a:fontRef idx="minor">
+            <a:schemeClr val="lt1"/>
+          </a:fontRef>
+        </p:style>
+        <p:txBody>
+          <a:bodyPr rtlCol="0" anchor="ctr"/>
+          <a:lstStyle/>
+          <a:p>
+            <a:pPr algn="ctr"/>
+          </a:p>
+        </p:txBody>
+      </p:sp>
+      <p:sp>
+        <p:nvSpPr>
+          <p:cNvPr id="31" name="TextBox 30"/>
+          <p:cNvSpPr txBox="1"/>
+          <p:nvPr/>
+        </p:nvSpPr>
+        <p:spPr>
+          <a:xfrm>
+            <a:off x="2606039" y="4892040"/>
+            <a:ext cx="960120" cy="548640"/>
+          </a:xfrm>
+          <a:prstGeom prst="rect">
+            <a:avLst/>
+          </a:prstGeom>
+          <a:noFill/>
+        </p:spPr>
+        <p:txBody>
+          <a:bodyPr wrap="square" anchor="ctr" lIns="27432" rIns="27432" tIns="9144" bIns="9144">
+            <a:spAutoFit/>
+          </a:bodyPr>
+          <a:lstStyle/>
+          <a:p>
+            <a:pPr algn="ctr">
+              <a:spcBef>
+                <a:spcPts val="0"/>
+              </a:spcBef>
+              <a:spcAft>
+                <a:spcPts val="200"/>
+              </a:spcAft>
+            </a:pPr>
+            <a:r>
+              <a:rPr sz="1100" b="1" i="0">
+                <a:solidFill>
+                  <a:srgbClr val="0D3D14"/>
+                </a:solidFill>
+                <a:latin typeface="Tahoma"/>
+              </a:rPr>
+              <a:t>กล่อง Edge</a:t>
+            </a:r>
+          </a:p>
+        </p:txBody>
+      </p:sp>
+      <p:sp>
+        <p:nvSpPr>
+          <p:cNvPr id="32" name="Rounded Rectangle 31"/>
+          <p:cNvSpPr/>
+          <p:nvPr/>
+        </p:nvSpPr>
+        <p:spPr>
+          <a:xfrm>
+            <a:off x="4069080" y="2011680"/>
+            <a:ext cx="2331720" cy="1234440"/>
+          </a:xfrm>
+          <a:prstGeom prst="roundRect">
+            <a:avLst/>
+          </a:prstGeom>
+          <a:solidFill>
+            <a:srgbClr val="FFFFFF"/>
+          </a:solidFill>
+          <a:ln w="15875">
+            <a:solidFill>
+              <a:srgbClr val="068734"/>
+            </a:solidFill>
+          </a:ln>
+          <a:effectLst/>
+        </p:spPr>
+        <p:style>
+          <a:lnRef idx="1">
+            <a:schemeClr val="accent1"/>
+          </a:lnRef>
+          <a:fillRef idx="3">
+            <a:schemeClr val="accent1"/>
+          </a:fillRef>
+          <a:effectRef idx="2">
+            <a:schemeClr val="accent1"/>
+          </a:effectRef>
+          <a:fontRef idx="minor">
+            <a:schemeClr val="lt1"/>
+          </a:fontRef>
+        </p:style>
+        <p:txBody>
+          <a:bodyPr rtlCol="0" anchor="ctr"/>
+          <a:lstStyle/>
+          <a:p>
+            <a:pPr algn="ctr"/>
+          </a:p>
+        </p:txBody>
+      </p:sp>
+      <p:sp>
+        <p:nvSpPr>
+          <p:cNvPr id="33" name="TextBox 32"/>
+          <p:cNvSpPr txBox="1"/>
+          <p:nvPr/>
+        </p:nvSpPr>
+        <p:spPr>
+          <a:xfrm>
+            <a:off x="4160520" y="2057400"/>
+            <a:ext cx="2148840" cy="1143000"/>
+          </a:xfrm>
+          <a:prstGeom prst="rect">
+            <a:avLst/>
+          </a:prstGeom>
+          <a:noFill/>
+        </p:spPr>
+        <p:txBody>
+          <a:bodyPr wrap="square" anchor="ctr" lIns="27432" rIns="27432" tIns="9144" bIns="9144">
+            <a:spAutoFit/>
+          </a:bodyPr>
+          <a:lstStyle/>
+          <a:p>
+            <a:pPr algn="ctr">
+              <a:spcBef>
+                <a:spcPts val="0"/>
+              </a:spcBef>
+              <a:spcAft>
+                <a:spcPts val="300"/>
+              </a:spcAft>
+            </a:pPr>
+            <a:r>
+              <a:rPr sz="1300" b="1" i="0">
+                <a:solidFill>
+                  <a:srgbClr val="0D3D14"/>
+                </a:solidFill>
+                <a:latin typeface="Tahoma"/>
+              </a:rPr>
+              <a:t>VPN ระหว่างไซต์ / IP whitelist</a:t>
+            </a:r>
+          </a:p>
+          <a:p>
+            <a:pPr algn="ctr">
+              <a:spcBef>
+                <a:spcPts val="0"/>
+              </a:spcBef>
+              <a:spcAft>
+                <a:spcPts val="300"/>
+              </a:spcAft>
+            </a:pPr>
+            <a:r>
+              <a:rPr sz="1100" b="0" i="0">
+                <a:solidFill>
+                  <a:srgbClr val="555555"/>
+                </a:solidFill>
+                <a:latin typeface="Tahoma"/>
+              </a:rPr>
+              <a:t>PC · จอ TV · กล่อง Edge</a:t>
+            </a:r>
+          </a:p>
+        </p:txBody>
+      </p:sp>
+      <p:sp>
+        <p:nvSpPr>
+          <p:cNvPr id="34" name="Rounded Rectangle 33"/>
+          <p:cNvSpPr/>
+          <p:nvPr/>
+        </p:nvSpPr>
+        <p:spPr>
+          <a:xfrm>
+            <a:off x="4069080" y="3611880"/>
+            <a:ext cx="2331720" cy="1234440"/>
+          </a:xfrm>
+          <a:prstGeom prst="roundRect">
+            <a:avLst/>
+          </a:prstGeom>
+          <a:solidFill>
+            <a:srgbClr val="FFFFFF"/>
+          </a:solidFill>
+          <a:ln w="15875">
+            <a:solidFill>
+              <a:srgbClr val="068734"/>
+            </a:solidFill>
+          </a:ln>
+          <a:effectLst/>
+        </p:spPr>
+        <p:style>
+          <a:lnRef idx="1">
+            <a:schemeClr val="accent1"/>
+          </a:lnRef>
+          <a:fillRef idx="3">
+            <a:schemeClr val="accent1"/>
+          </a:fillRef>
+          <a:effectRef idx="2">
+            <a:schemeClr val="accent1"/>
+          </a:effectRef>
+          <a:fontRef idx="minor">
+            <a:schemeClr val="lt1"/>
+          </a:fontRef>
+        </p:style>
+        <p:txBody>
+          <a:bodyPr rtlCol="0" anchor="ctr"/>
+          <a:lstStyle/>
+          <a:p>
+            <a:pPr algn="ctr"/>
+          </a:p>
+        </p:txBody>
+      </p:sp>
+      <p:sp>
+        <p:nvSpPr>
+          <p:cNvPr id="35" name="TextBox 34"/>
+          <p:cNvSpPr txBox="1"/>
+          <p:nvPr/>
+        </p:nvSpPr>
+        <p:spPr>
+          <a:xfrm>
+            <a:off x="4160520" y="3657600"/>
+            <a:ext cx="2148840" cy="1143000"/>
+          </a:xfrm>
+          <a:prstGeom prst="rect">
+            <a:avLst/>
+          </a:prstGeom>
+          <a:noFill/>
+        </p:spPr>
+        <p:txBody>
+          <a:bodyPr wrap="square" anchor="ctr" lIns="27432" rIns="27432" tIns="9144" bIns="9144">
+            <a:spAutoFit/>
+          </a:bodyPr>
+          <a:lstStyle/>
+          <a:p>
+            <a:pPr algn="ctr">
+              <a:spcBef>
+                <a:spcPts val="0"/>
+              </a:spcBef>
+              <a:spcAft>
+                <a:spcPts val="300"/>
+              </a:spcAft>
+            </a:pPr>
+            <a:r>
+              <a:rPr sz="1300" b="1" i="0">
+                <a:solidFill>
+                  <a:srgbClr val="0D3D14"/>
+                </a:solidFill>
+                <a:latin typeface="Tahoma"/>
+              </a:rPr>
+              <a:t>Cloudflare Zero Trust + SSO</a:t>
+            </a:r>
+          </a:p>
+          <a:p>
+            <a:pPr algn="ctr">
+              <a:spcBef>
+                <a:spcPts val="0"/>
+              </a:spcBef>
+              <a:spcAft>
+                <a:spcPts val="300"/>
+              </a:spcAft>
+            </a:pPr>
+            <a:r>
+              <a:rPr sz="1100" b="0" i="0">
+                <a:solidFill>
+                  <a:srgbClr val="555555"/>
+                </a:solidFill>
+                <a:latin typeface="Tahoma"/>
+              </a:rPr>
+              <a:t>มือถือ · ล็อกอินด้วยบัญชี M365</a:t>
+            </a:r>
+          </a:p>
+        </p:txBody>
+      </p:sp>
+      <p:cxnSp>
+        <p:nvCxnSpPr>
+          <p:cNvPr id="36" name="Connector 35"/>
+          <p:cNvCxnSpPr/>
+          <p:nvPr/>
+        </p:nvCxnSpPr>
+        <p:spPr>
+          <a:xfrm>
+            <a:off x="3657600" y="2331720"/>
+            <a:ext cx="411480" cy="228600"/>
+          </a:xfrm>
+          <a:prstGeom prst="line">
+            <a:avLst/>
+          </a:prstGeom>
+          <a:ln w="25400">
+            <a:solidFill>
+              <a:srgbClr val="068734"/>
+            </a:solidFill>
+            <a:tailEnd type="triangle"/>
+          </a:ln>
+        </p:spPr>
+        <p:style>
+          <a:lnRef idx="2">
+            <a:schemeClr val="accent1"/>
+          </a:lnRef>
+          <a:fillRef idx="0">
+            <a:schemeClr val="accent1"/>
+          </a:fillRef>
+          <a:effectRef idx="1">
+            <a:schemeClr val="accent1"/>
+          </a:effectRef>
+          <a:fontRef idx="minor">
+            <a:schemeClr val="tx1"/>
+          </a:fontRef>
+        </p:style>
+      </p:cxnSp>
+      <p:cxnSp>
+        <p:nvCxnSpPr>
+          <p:cNvPr id="37" name="Connector 36"/>
+          <p:cNvCxnSpPr/>
+          <p:nvPr/>
+        </p:nvCxnSpPr>
+        <p:spPr>
+          <a:xfrm flipV="1">
+            <a:off x="3657600" y="2743200"/>
+            <a:ext cx="411480" cy="914400"/>
+          </a:xfrm>
+          <a:prstGeom prst="line">
+            <a:avLst/>
+          </a:prstGeom>
+          <a:ln w="25400">
+            <a:solidFill>
+              <a:srgbClr val="068734"/>
+            </a:solidFill>
+            <a:tailEnd type="triangle"/>
+          </a:ln>
+        </p:spPr>
+        <p:style>
+          <a:lnRef idx="2">
+            <a:schemeClr val="accent1"/>
+          </a:lnRef>
+          <a:fillRef idx="0">
+            <a:schemeClr val="accent1"/>
+          </a:fillRef>
+          <a:effectRef idx="1">
+            <a:schemeClr val="accent1"/>
+          </a:effectRef>
+          <a:fontRef idx="minor">
+            <a:schemeClr val="tx1"/>
+          </a:fontRef>
+        </p:style>
+      </p:cxnSp>
+      <p:cxnSp>
+        <p:nvCxnSpPr>
+          <p:cNvPr id="38" name="Connector 37"/>
+          <p:cNvCxnSpPr/>
+          <p:nvPr/>
+        </p:nvCxnSpPr>
+        <p:spPr>
+          <a:xfrm flipV="1">
+            <a:off x="3657600" y="2926080"/>
+            <a:ext cx="411480" cy="2057400"/>
+          </a:xfrm>
+          <a:prstGeom prst="line">
+            <a:avLst/>
+          </a:prstGeom>
+          <a:ln w="25400">
+            <a:solidFill>
+              <a:srgbClr val="068734"/>
+            </a:solidFill>
+            <a:tailEnd type="triangle"/>
+          </a:ln>
+        </p:spPr>
+        <p:style>
+          <a:lnRef idx="2">
+            <a:schemeClr val="accent1"/>
+          </a:lnRef>
+          <a:fillRef idx="0">
+            <a:schemeClr val="accent1"/>
+          </a:fillRef>
+          <a:effectRef idx="1">
+            <a:schemeClr val="accent1"/>
+          </a:effectRef>
+          <a:fontRef idx="minor">
+            <a:schemeClr val="tx1"/>
+          </a:fontRef>
+        </p:style>
+      </p:cxnSp>
+      <p:cxnSp>
+        <p:nvCxnSpPr>
+          <p:cNvPr id="39" name="Connector 38"/>
+          <p:cNvCxnSpPr/>
+          <p:nvPr/>
+        </p:nvCxnSpPr>
+        <p:spPr>
+          <a:xfrm>
+            <a:off x="3657600" y="2468880"/>
+            <a:ext cx="411480" cy="1645920"/>
+          </a:xfrm>
+          <a:prstGeom prst="line">
+            <a:avLst/>
+          </a:prstGeom>
+          <a:ln w="25400">
+            <a:solidFill>
+              <a:srgbClr val="068734"/>
+            </a:solidFill>
+            <a:tailEnd type="triangle"/>
+          </a:ln>
+        </p:spPr>
+        <p:style>
+          <a:lnRef idx="2">
+            <a:schemeClr val="accent1"/>
+          </a:lnRef>
+          <a:fillRef idx="0">
+            <a:schemeClr val="accent1"/>
+          </a:fillRef>
+          <a:effectRef idx="1">
+            <a:schemeClr val="accent1"/>
+          </a:effectRef>
+          <a:fontRef idx="minor">
+            <a:schemeClr val="tx1"/>
+          </a:fontRef>
+        </p:style>
+      </p:cxnSp>
+      <p:cxnSp>
+        <p:nvCxnSpPr>
+          <p:cNvPr id="40" name="Connector 39"/>
+          <p:cNvCxnSpPr/>
+          <p:nvPr/>
+        </p:nvCxnSpPr>
+        <p:spPr>
+          <a:xfrm>
+            <a:off x="3657600" y="3794760"/>
+            <a:ext cx="411480" cy="411480"/>
+          </a:xfrm>
+          <a:prstGeom prst="line">
+            <a:avLst/>
+          </a:prstGeom>
+          <a:ln w="25400">
+            <a:solidFill>
+              <a:srgbClr val="068734"/>
+            </a:solidFill>
+            <a:tailEnd type="triangle"/>
+          </a:ln>
+        </p:spPr>
+        <p:style>
+          <a:lnRef idx="2">
+            <a:schemeClr val="accent1"/>
+          </a:lnRef>
+          <a:fillRef idx="0">
+            <a:schemeClr val="accent1"/>
+          </a:fillRef>
+          <a:effectRef idx="1">
+            <a:schemeClr val="accent1"/>
+          </a:effectRef>
+          <a:fontRef idx="minor">
+            <a:schemeClr val="tx1"/>
+          </a:fontRef>
+        </p:style>
+      </p:cxnSp>
+      <p:cxnSp>
+        <p:nvCxnSpPr>
+          <p:cNvPr id="41" name="Connector 40"/>
+          <p:cNvCxnSpPr/>
+          <p:nvPr/>
+        </p:nvCxnSpPr>
+        <p:spPr>
+          <a:xfrm flipV="1">
+            <a:off x="3657600" y="4297680"/>
+            <a:ext cx="411480" cy="822960"/>
+          </a:xfrm>
+          <a:prstGeom prst="line">
+            <a:avLst/>
+          </a:prstGeom>
+          <a:ln w="25400">
+            <a:solidFill>
+              <a:srgbClr val="068734"/>
+            </a:solidFill>
+            <a:tailEnd type="triangle"/>
+          </a:ln>
+        </p:spPr>
+        <p:style>
+          <a:lnRef idx="2">
+            <a:schemeClr val="accent1"/>
+          </a:lnRef>
+          <a:fillRef idx="0">
+            <a:schemeClr val="accent1"/>
+          </a:fillRef>
+          <a:effectRef idx="1">
+            <a:schemeClr val="accent1"/>
+          </a:effectRef>
+          <a:fontRef idx="minor">
+            <a:schemeClr val="tx1"/>
+          </a:fontRef>
+        </p:style>
+      </p:cxnSp>
+      <p:cxnSp>
+        <p:nvCxnSpPr>
+          <p:cNvPr id="42" name="Connector 41"/>
+          <p:cNvCxnSpPr/>
+          <p:nvPr/>
+        </p:nvCxnSpPr>
+        <p:spPr>
+          <a:xfrm>
+            <a:off x="6400800" y="2606040"/>
+            <a:ext cx="365760" cy="0"/>
+          </a:xfrm>
+          <a:prstGeom prst="line">
+            <a:avLst/>
+          </a:prstGeom>
+          <a:ln w="25400">
+            <a:solidFill>
+              <a:srgbClr val="068734"/>
+            </a:solidFill>
+            <a:tailEnd type="triangle"/>
+          </a:ln>
+        </p:spPr>
+        <p:style>
+          <a:lnRef idx="2">
+            <a:schemeClr val="accent1"/>
+          </a:lnRef>
+          <a:fillRef idx="0">
+            <a:schemeClr val="accent1"/>
+          </a:fillRef>
+          <a:effectRef idx="1">
+            <a:schemeClr val="accent1"/>
+          </a:effectRef>
+          <a:fontRef idx="minor">
+            <a:schemeClr val="tx1"/>
+          </a:fontRef>
+        </p:style>
+      </p:cxnSp>
+      <p:cxnSp>
+        <p:nvCxnSpPr>
+          <p:cNvPr id="43" name="Connector 42"/>
+          <p:cNvCxnSpPr/>
+          <p:nvPr/>
+        </p:nvCxnSpPr>
+        <p:spPr>
+          <a:xfrm>
+            <a:off x="6400800" y="4206240"/>
+            <a:ext cx="365760" cy="0"/>
+          </a:xfrm>
+          <a:prstGeom prst="line">
+            <a:avLst/>
+          </a:prstGeom>
+          <a:ln w="25400">
+            <a:solidFill>
+              <a:srgbClr val="068734"/>
+            </a:solidFill>
+            <a:tailEnd type="triangle"/>
+          </a:ln>
+        </p:spPr>
+        <p:style>
+          <a:lnRef idx="2">
+            <a:schemeClr val="accent1"/>
+          </a:lnRef>
+          <a:fillRef idx="0">
+            <a:schemeClr val="accent1"/>
+          </a:fillRef>
+          <a:effectRef idx="1">
+            <a:schemeClr val="accent1"/>
+          </a:effectRef>
+          <a:fontRef idx="minor">
+            <a:schemeClr val="tx1"/>
+          </a:fontRef>
+        </p:style>
+      </p:cxnSp>
+      <p:sp>
+        <p:nvSpPr>
+          <p:cNvPr id="44" name="Rounded Rectangle 43"/>
+          <p:cNvSpPr/>
+          <p:nvPr/>
+        </p:nvSpPr>
+        <p:spPr>
+          <a:xfrm>
+            <a:off x="6766560" y="1371600"/>
+            <a:ext cx="5029200" cy="4251960"/>
+          </a:xfrm>
+          <a:prstGeom prst="roundRect">
+            <a:avLst/>
+          </a:prstGeom>
+          <a:solidFill>
+            <a:srgbClr val="F2F2F2"/>
+          </a:solidFill>
+          <a:ln w="9525">
+            <a:solidFill>
+              <a:srgbClr val="D9D9D9"/>
+            </a:solidFill>
+          </a:ln>
+          <a:effectLst/>
+        </p:spPr>
+        <p:style>
+          <a:lnRef idx="1">
+            <a:schemeClr val="accent1"/>
+          </a:lnRef>
+          <a:fillRef idx="3">
+            <a:schemeClr val="accent1"/>
+          </a:fillRef>
+          <a:effectRef idx="2">
+            <a:schemeClr val="accent1"/>
+          </a:effectRef>
+          <a:fontRef idx="minor">
+            <a:schemeClr val="lt1"/>
+          </a:fontRef>
+        </p:style>
+        <p:txBody>
+          <a:bodyPr rtlCol="0" anchor="ctr"/>
+          <a:lstStyle/>
+          <a:p>
+            <a:pPr algn="ctr"/>
+          </a:p>
+        </p:txBody>
+      </p:sp>
+      <p:sp>
+        <p:nvSpPr>
+          <p:cNvPr id="45" name="TextBox 44"/>
+          <p:cNvSpPr txBox="1"/>
+          <p:nvPr/>
+        </p:nvSpPr>
+        <p:spPr>
+          <a:xfrm>
+            <a:off x="6903720" y="1417320"/>
+            <a:ext cx="4754880" cy="365760"/>
           </a:xfrm>
           <a:prstGeom prst="rect">
             <a:avLst/>
@@ -8829,29 +10636,1812 @@
               </a:spcAft>
             </a:pPr>
             <a:r>
-              <a:rPr sz="1700" b="1" i="0">
+              <a:rPr sz="1300" b="1" i="0">
+                <a:solidFill>
+                  <a:srgbClr val="068734"/>
+                </a:solidFill>
+                <a:latin typeface="Tahoma"/>
+              </a:rPr>
+              <a:t>ศูนย์กลาง ESM ที่ INET — Kubernetes 3 เครื่อง (ล่ม 1 ยังวิ่ง)</a:t>
+            </a:r>
+          </a:p>
+        </p:txBody>
+      </p:sp>
+      <p:sp>
+        <p:nvSpPr>
+          <p:cNvPr id="46" name="Rounded Rectangle 45"/>
+          <p:cNvSpPr/>
+          <p:nvPr/>
+        </p:nvSpPr>
+        <p:spPr>
+          <a:xfrm>
+            <a:off x="6903720" y="1828800"/>
+            <a:ext cx="2331720" cy="777240"/>
+          </a:xfrm>
+          <a:prstGeom prst="roundRect">
+            <a:avLst/>
+          </a:prstGeom>
+          <a:solidFill>
+            <a:srgbClr val="FFFFFF"/>
+          </a:solidFill>
+          <a:ln w="9525">
+            <a:solidFill>
+              <a:srgbClr val="D9D9D9"/>
+            </a:solidFill>
+          </a:ln>
+          <a:effectLst/>
+        </p:spPr>
+        <p:style>
+          <a:lnRef idx="1">
+            <a:schemeClr val="accent1"/>
+          </a:lnRef>
+          <a:fillRef idx="3">
+            <a:schemeClr val="accent1"/>
+          </a:fillRef>
+          <a:effectRef idx="2">
+            <a:schemeClr val="accent1"/>
+          </a:effectRef>
+          <a:fontRef idx="minor">
+            <a:schemeClr val="lt1"/>
+          </a:fontRef>
+        </p:style>
+        <p:txBody>
+          <a:bodyPr rtlCol="0" anchor="ctr"/>
+          <a:lstStyle/>
+          <a:p>
+            <a:pPr algn="ctr"/>
+          </a:p>
+        </p:txBody>
+      </p:sp>
+      <p:sp>
+        <p:nvSpPr>
+          <p:cNvPr id="47" name="TextBox 46"/>
+          <p:cNvSpPr txBox="1"/>
+          <p:nvPr/>
+        </p:nvSpPr>
+        <p:spPr>
+          <a:xfrm>
+            <a:off x="6903720" y="1828800"/>
+            <a:ext cx="2331720" cy="777240"/>
+          </a:xfrm>
+          <a:prstGeom prst="rect">
+            <a:avLst/>
+          </a:prstGeom>
+          <a:noFill/>
+        </p:spPr>
+        <p:txBody>
+          <a:bodyPr wrap="square" anchor="ctr" lIns="27432" rIns="27432" tIns="9144" bIns="9144">
+            <a:spAutoFit/>
+          </a:bodyPr>
+          <a:lstStyle/>
+          <a:p>
+            <a:pPr algn="ctr">
+              <a:spcBef>
+                <a:spcPts val="0"/>
+              </a:spcBef>
+              <a:spcAft>
+                <a:spcPts val="0"/>
+              </a:spcAft>
+            </a:pPr>
+            <a:r>
+              <a:rPr sz="1300" b="1" i="0">
                 <a:solidFill>
                   <a:srgbClr val="0D3D14"/>
                 </a:solidFill>
                 <a:latin typeface="Tahoma"/>
               </a:rPr>
-              <a:t>คำถามถึงไอที</a:t>
-            </a:r>
-          </a:p>
-        </p:txBody>
-      </p:sp>
-      <p:sp>
-        <p:nvSpPr>
-          <p:cNvPr id="8" name="Oval 7"/>
+              <a:t>หน้าเว็บ</a:t>
+            </a:r>
+          </a:p>
+          <a:p>
+            <a:pPr algn="ctr">
+              <a:spcBef>
+                <a:spcPts val="0"/>
+              </a:spcBef>
+              <a:spcAft>
+                <a:spcPts val="0"/>
+              </a:spcAft>
+            </a:pPr>
+            <a:r>
+              <a:rPr sz="1100" b="0" i="0">
+                <a:solidFill>
+                  <a:srgbClr val="555555"/>
+                </a:solidFill>
+                <a:latin typeface="Tahoma"/>
+              </a:rPr>
+              <a:t>image เดียว ทุกโรงงาน</a:t>
+            </a:r>
+          </a:p>
+        </p:txBody>
+      </p:sp>
+      <p:sp>
+        <p:nvSpPr>
+          <p:cNvPr id="48" name="Rounded Rectangle 47"/>
           <p:cNvSpPr/>
           <p:nvPr/>
         </p:nvSpPr>
         <p:spPr>
           <a:xfrm>
-            <a:off x="685800" y="2112264"/>
-            <a:ext cx="384048" cy="384048"/>
-          </a:xfrm>
-          <a:prstGeom prst="ellipse">
+            <a:off x="9326880" y="1828800"/>
+            <a:ext cx="2331720" cy="777240"/>
+          </a:xfrm>
+          <a:prstGeom prst="roundRect">
+            <a:avLst/>
+          </a:prstGeom>
+          <a:solidFill>
+            <a:srgbClr val="FFFFFF"/>
+          </a:solidFill>
+          <a:ln w="9525">
+            <a:solidFill>
+              <a:srgbClr val="D9D9D9"/>
+            </a:solidFill>
+          </a:ln>
+          <a:effectLst/>
+        </p:spPr>
+        <p:style>
+          <a:lnRef idx="1">
+            <a:schemeClr val="accent1"/>
+          </a:lnRef>
+          <a:fillRef idx="3">
+            <a:schemeClr val="accent1"/>
+          </a:fillRef>
+          <a:effectRef idx="2">
+            <a:schemeClr val="accent1"/>
+          </a:effectRef>
+          <a:fontRef idx="minor">
+            <a:schemeClr val="lt1"/>
+          </a:fontRef>
+        </p:style>
+        <p:txBody>
+          <a:bodyPr rtlCol="0" anchor="ctr"/>
+          <a:lstStyle/>
+          <a:p>
+            <a:pPr algn="ctr"/>
+          </a:p>
+        </p:txBody>
+      </p:sp>
+      <p:sp>
+        <p:nvSpPr>
+          <p:cNvPr id="49" name="TextBox 48"/>
+          <p:cNvSpPr txBox="1"/>
+          <p:nvPr/>
+        </p:nvSpPr>
+        <p:spPr>
+          <a:xfrm>
+            <a:off x="9326880" y="1828800"/>
+            <a:ext cx="2331720" cy="777240"/>
+          </a:xfrm>
+          <a:prstGeom prst="rect">
+            <a:avLst/>
+          </a:prstGeom>
+          <a:noFill/>
+        </p:spPr>
+        <p:txBody>
+          <a:bodyPr wrap="square" anchor="ctr" lIns="27432" rIns="27432" tIns="9144" bIns="9144">
+            <a:spAutoFit/>
+          </a:bodyPr>
+          <a:lstStyle/>
+          <a:p>
+            <a:pPr algn="ctr">
+              <a:spcBef>
+                <a:spcPts val="0"/>
+              </a:spcBef>
+              <a:spcAft>
+                <a:spcPts val="0"/>
+              </a:spcAft>
+            </a:pPr>
+            <a:r>
+              <a:rPr sz="1300" b="1" i="0">
+                <a:solidFill>
+                  <a:srgbClr val="0D3D14"/>
+                </a:solidFill>
+                <a:latin typeface="Tahoma"/>
+              </a:rPr>
+              <a:t>ล็อกอิน + สิทธิ์</a:t>
+            </a:r>
+          </a:p>
+          <a:p>
+            <a:pPr algn="ctr">
+              <a:spcBef>
+                <a:spcPts val="0"/>
+              </a:spcBef>
+              <a:spcAft>
+                <a:spcPts val="0"/>
+              </a:spcAft>
+            </a:pPr>
+            <a:r>
+              <a:rPr sz="1100" b="0" i="0">
+                <a:solidFill>
+                  <a:srgbClr val="555555"/>
+                </a:solidFill>
+                <a:latin typeface="Tahoma"/>
+              </a:rPr>
+              <a:t>SSO · role ต่อบริษัท</a:t>
+            </a:r>
+          </a:p>
+        </p:txBody>
+      </p:sp>
+      <p:sp>
+        <p:nvSpPr>
+          <p:cNvPr id="50" name="Rounded Rectangle 49"/>
+          <p:cNvSpPr/>
+          <p:nvPr/>
+        </p:nvSpPr>
+        <p:spPr>
+          <a:xfrm>
+            <a:off x="6903720" y="2724912"/>
+            <a:ext cx="2331720" cy="777240"/>
+          </a:xfrm>
+          <a:prstGeom prst="roundRect">
+            <a:avLst/>
+          </a:prstGeom>
+          <a:solidFill>
+            <a:srgbClr val="FFFFFF"/>
+          </a:solidFill>
+          <a:ln w="9525">
+            <a:solidFill>
+              <a:srgbClr val="D9D9D9"/>
+            </a:solidFill>
+          </a:ln>
+          <a:effectLst/>
+        </p:spPr>
+        <p:style>
+          <a:lnRef idx="1">
+            <a:schemeClr val="accent1"/>
+          </a:lnRef>
+          <a:fillRef idx="3">
+            <a:schemeClr val="accent1"/>
+          </a:fillRef>
+          <a:effectRef idx="2">
+            <a:schemeClr val="accent1"/>
+          </a:effectRef>
+          <a:fontRef idx="minor">
+            <a:schemeClr val="lt1"/>
+          </a:fontRef>
+        </p:style>
+        <p:txBody>
+          <a:bodyPr rtlCol="0" anchor="ctr"/>
+          <a:lstStyle/>
+          <a:p>
+            <a:pPr algn="ctr"/>
+          </a:p>
+        </p:txBody>
+      </p:sp>
+      <p:sp>
+        <p:nvSpPr>
+          <p:cNvPr id="51" name="TextBox 50"/>
+          <p:cNvSpPr txBox="1"/>
+          <p:nvPr/>
+        </p:nvSpPr>
+        <p:spPr>
+          <a:xfrm>
+            <a:off x="6903720" y="2724912"/>
+            <a:ext cx="2331720" cy="777240"/>
+          </a:xfrm>
+          <a:prstGeom prst="rect">
+            <a:avLst/>
+          </a:prstGeom>
+          <a:noFill/>
+        </p:spPr>
+        <p:txBody>
+          <a:bodyPr wrap="square" anchor="ctr" lIns="27432" rIns="27432" tIns="9144" bIns="9144">
+            <a:spAutoFit/>
+          </a:bodyPr>
+          <a:lstStyle/>
+          <a:p>
+            <a:pPr algn="ctr">
+              <a:spcBef>
+                <a:spcPts val="0"/>
+              </a:spcBef>
+              <a:spcAft>
+                <a:spcPts val="0"/>
+              </a:spcAft>
+            </a:pPr>
+            <a:r>
+              <a:rPr sz="1300" b="1" i="0">
+                <a:solidFill>
+                  <a:srgbClr val="0D3D14"/>
+                </a:solidFill>
+                <a:latin typeface="Tahoma"/>
+              </a:rPr>
+              <a:t>ฐานข้อมูล Main</a:t>
+            </a:r>
+          </a:p>
+          <a:p>
+            <a:pPr algn="ctr">
+              <a:spcBef>
+                <a:spcPts val="0"/>
+              </a:spcBef>
+              <a:spcAft>
+                <a:spcPts val="0"/>
+              </a:spcAft>
+            </a:pPr>
+            <a:r>
+              <a:rPr sz="1100" b="0" i="0">
+                <a:solidFill>
+                  <a:srgbClr val="555555"/>
+                </a:solidFill>
+                <a:latin typeface="Tahoma"/>
+              </a:rPr>
+              <a:t>คน · ผังองค์กร TSG→บริษัท</a:t>
+            </a:r>
+          </a:p>
+        </p:txBody>
+      </p:sp>
+      <p:sp>
+        <p:nvSpPr>
+          <p:cNvPr id="52" name="Rounded Rectangle 51"/>
+          <p:cNvSpPr/>
+          <p:nvPr/>
+        </p:nvSpPr>
+        <p:spPr>
+          <a:xfrm>
+            <a:off x="9326880" y="2724912"/>
+            <a:ext cx="2331720" cy="777240"/>
+          </a:xfrm>
+          <a:prstGeom prst="roundRect">
+            <a:avLst/>
+          </a:prstGeom>
+          <a:solidFill>
+            <a:srgbClr val="FFFFFF"/>
+          </a:solidFill>
+          <a:ln w="9525">
+            <a:solidFill>
+              <a:srgbClr val="D9D9D9"/>
+            </a:solidFill>
+          </a:ln>
+          <a:effectLst/>
+        </p:spPr>
+        <p:style>
+          <a:lnRef idx="1">
+            <a:schemeClr val="accent1"/>
+          </a:lnRef>
+          <a:fillRef idx="3">
+            <a:schemeClr val="accent1"/>
+          </a:fillRef>
+          <a:effectRef idx="2">
+            <a:schemeClr val="accent1"/>
+          </a:effectRef>
+          <a:fontRef idx="minor">
+            <a:schemeClr val="lt1"/>
+          </a:fontRef>
+        </p:style>
+        <p:txBody>
+          <a:bodyPr rtlCol="0" anchor="ctr"/>
+          <a:lstStyle/>
+          <a:p>
+            <a:pPr algn="ctr"/>
+          </a:p>
+        </p:txBody>
+      </p:sp>
+      <p:sp>
+        <p:nvSpPr>
+          <p:cNvPr id="53" name="TextBox 52"/>
+          <p:cNvSpPr txBox="1"/>
+          <p:nvPr/>
+        </p:nvSpPr>
+        <p:spPr>
+          <a:xfrm>
+            <a:off x="9326880" y="2724912"/>
+            <a:ext cx="2331720" cy="777240"/>
+          </a:xfrm>
+          <a:prstGeom prst="rect">
+            <a:avLst/>
+          </a:prstGeom>
+          <a:noFill/>
+        </p:spPr>
+        <p:txBody>
+          <a:bodyPr wrap="square" anchor="ctr" lIns="27432" rIns="27432" tIns="9144" bIns="9144">
+            <a:spAutoFit/>
+          </a:bodyPr>
+          <a:lstStyle/>
+          <a:p>
+            <a:pPr algn="ctr">
+              <a:spcBef>
+                <a:spcPts val="0"/>
+              </a:spcBef>
+              <a:spcAft>
+                <a:spcPts val="0"/>
+              </a:spcAft>
+            </a:pPr>
+            <a:r>
+              <a:rPr sz="1300" b="1" i="0">
+                <a:solidFill>
+                  <a:srgbClr val="0D3D14"/>
+                </a:solidFill>
+                <a:latin typeface="Tahoma"/>
+              </a:rPr>
+              <a:t>ฐานข้อมูล DR</a:t>
+            </a:r>
+          </a:p>
+          <a:p>
+            <a:pPr algn="ctr">
+              <a:spcBef>
+                <a:spcPts val="0"/>
+              </a:spcBef>
+              <a:spcAft>
+                <a:spcPts val="0"/>
+              </a:spcAft>
+            </a:pPr>
+            <a:r>
+              <a:rPr sz="1100" b="0" i="0">
+                <a:solidFill>
+                  <a:srgbClr val="555555"/>
+                </a:solidFill>
+                <a:latin typeface="Tahoma"/>
+              </a:rPr>
+              <a:t>ข้อมูลผลิต · แยกด้วย company_id</a:t>
+            </a:r>
+          </a:p>
+        </p:txBody>
+      </p:sp>
+      <p:sp>
+        <p:nvSpPr>
+          <p:cNvPr id="54" name="Rounded Rectangle 53"/>
+          <p:cNvSpPr/>
+          <p:nvPr/>
+        </p:nvSpPr>
+        <p:spPr>
+          <a:xfrm>
+            <a:off x="6903720" y="3621024"/>
+            <a:ext cx="2331720" cy="777240"/>
+          </a:xfrm>
+          <a:prstGeom prst="roundRect">
+            <a:avLst/>
+          </a:prstGeom>
+          <a:solidFill>
+            <a:srgbClr val="FFFFFF"/>
+          </a:solidFill>
+          <a:ln w="9525">
+            <a:solidFill>
+              <a:srgbClr val="D9D9D9"/>
+            </a:solidFill>
+          </a:ln>
+          <a:effectLst/>
+        </p:spPr>
+        <p:style>
+          <a:lnRef idx="1">
+            <a:schemeClr val="accent1"/>
+          </a:lnRef>
+          <a:fillRef idx="3">
+            <a:schemeClr val="accent1"/>
+          </a:fillRef>
+          <a:effectRef idx="2">
+            <a:schemeClr val="accent1"/>
+          </a:effectRef>
+          <a:fontRef idx="minor">
+            <a:schemeClr val="lt1"/>
+          </a:fontRef>
+        </p:style>
+        <p:txBody>
+          <a:bodyPr rtlCol="0" anchor="ctr"/>
+          <a:lstStyle/>
+          <a:p>
+            <a:pPr algn="ctr"/>
+          </a:p>
+        </p:txBody>
+      </p:sp>
+      <p:sp>
+        <p:nvSpPr>
+          <p:cNvPr id="55" name="TextBox 54"/>
+          <p:cNvSpPr txBox="1"/>
+          <p:nvPr/>
+        </p:nvSpPr>
+        <p:spPr>
+          <a:xfrm>
+            <a:off x="6903720" y="3621024"/>
+            <a:ext cx="2331720" cy="777240"/>
+          </a:xfrm>
+          <a:prstGeom prst="rect">
+            <a:avLst/>
+          </a:prstGeom>
+          <a:noFill/>
+        </p:spPr>
+        <p:txBody>
+          <a:bodyPr wrap="square" anchor="ctr" lIns="27432" rIns="27432" tIns="9144" bIns="9144">
+            <a:spAutoFit/>
+          </a:bodyPr>
+          <a:lstStyle/>
+          <a:p>
+            <a:pPr algn="ctr">
+              <a:spcBef>
+                <a:spcPts val="0"/>
+              </a:spcBef>
+              <a:spcAft>
+                <a:spcPts val="0"/>
+              </a:spcAft>
+            </a:pPr>
+            <a:r>
+              <a:rPr sz="1300" b="1" i="0">
+                <a:solidFill>
+                  <a:srgbClr val="0D3D14"/>
+                </a:solidFill>
+                <a:latin typeface="Tahoma"/>
+              </a:rPr>
+              <a:t>หลังบ้าน + cron</a:t>
+            </a:r>
+          </a:p>
+          <a:p>
+            <a:pPr algn="ctr">
+              <a:spcBef>
+                <a:spcPts val="0"/>
+              </a:spcBef>
+              <a:spcAft>
+                <a:spcPts val="0"/>
+              </a:spcAft>
+            </a:pPr>
+            <a:r>
+              <a:rPr sz="1100" b="0" i="0">
+                <a:solidFill>
+                  <a:srgbClr val="555555"/>
+                </a:solidFill>
+                <a:latin typeface="Tahoma"/>
+              </a:rPr>
+              <a:t>แจ้งเตือน · สแกน PM</a:t>
+            </a:r>
+          </a:p>
+        </p:txBody>
+      </p:sp>
+      <p:sp>
+        <p:nvSpPr>
+          <p:cNvPr id="56" name="Rounded Rectangle 55"/>
+          <p:cNvSpPr/>
+          <p:nvPr/>
+        </p:nvSpPr>
+        <p:spPr>
+          <a:xfrm>
+            <a:off x="9326880" y="3621024"/>
+            <a:ext cx="2331720" cy="777240"/>
+          </a:xfrm>
+          <a:prstGeom prst="roundRect">
+            <a:avLst/>
+          </a:prstGeom>
+          <a:solidFill>
+            <a:srgbClr val="FFFFFF"/>
+          </a:solidFill>
+          <a:ln w="9525">
+            <a:solidFill>
+              <a:srgbClr val="D9D9D9"/>
+            </a:solidFill>
+          </a:ln>
+          <a:effectLst/>
+        </p:spPr>
+        <p:style>
+          <a:lnRef idx="1">
+            <a:schemeClr val="accent1"/>
+          </a:lnRef>
+          <a:fillRef idx="3">
+            <a:schemeClr val="accent1"/>
+          </a:fillRef>
+          <a:effectRef idx="2">
+            <a:schemeClr val="accent1"/>
+          </a:effectRef>
+          <a:fontRef idx="minor">
+            <a:schemeClr val="lt1"/>
+          </a:fontRef>
+        </p:style>
+        <p:txBody>
+          <a:bodyPr rtlCol="0" anchor="ctr"/>
+          <a:lstStyle/>
+          <a:p>
+            <a:pPr algn="ctr"/>
+          </a:p>
+        </p:txBody>
+      </p:sp>
+      <p:sp>
+        <p:nvSpPr>
+          <p:cNvPr id="57" name="TextBox 56"/>
+          <p:cNvSpPr txBox="1"/>
+          <p:nvPr/>
+        </p:nvSpPr>
+        <p:spPr>
+          <a:xfrm>
+            <a:off x="9326880" y="3621024"/>
+            <a:ext cx="2331720" cy="777240"/>
+          </a:xfrm>
+          <a:prstGeom prst="rect">
+            <a:avLst/>
+          </a:prstGeom>
+          <a:noFill/>
+        </p:spPr>
+        <p:txBody>
+          <a:bodyPr wrap="square" anchor="ctr" lIns="27432" rIns="27432" tIns="9144" bIns="9144">
+            <a:spAutoFit/>
+          </a:bodyPr>
+          <a:lstStyle/>
+          <a:p>
+            <a:pPr algn="ctr">
+              <a:spcBef>
+                <a:spcPts val="0"/>
+              </a:spcBef>
+              <a:spcAft>
+                <a:spcPts val="0"/>
+              </a:spcAft>
+            </a:pPr>
+            <a:r>
+              <a:rPr sz="1300" b="1" i="0">
+                <a:solidFill>
+                  <a:srgbClr val="0D3D14"/>
+                </a:solidFill>
+                <a:latin typeface="Tahoma"/>
+              </a:rPr>
+              <a:t>รายงานรวมกลุ่ม</a:t>
+            </a:r>
+          </a:p>
+          <a:p>
+            <a:pPr algn="ctr">
+              <a:spcBef>
+                <a:spcPts val="0"/>
+              </a:spcBef>
+              <a:spcAft>
+                <a:spcPts val="0"/>
+              </a:spcAft>
+            </a:pPr>
+            <a:r>
+              <a:rPr sz="1100" b="0" i="0">
+                <a:solidFill>
+                  <a:srgbClr val="555555"/>
+                </a:solidFill>
+                <a:latin typeface="Tahoma"/>
+              </a:rPr>
+              <a:t>OBEYA · Group Overview</a:t>
+            </a:r>
+          </a:p>
+        </p:txBody>
+      </p:sp>
+      <p:sp>
+        <p:nvSpPr>
+          <p:cNvPr id="58" name="Rounded Rectangle 57"/>
+          <p:cNvSpPr/>
+          <p:nvPr/>
+        </p:nvSpPr>
+        <p:spPr>
+          <a:xfrm>
+            <a:off x="6903720" y="4553712"/>
+            <a:ext cx="4754880" cy="960120"/>
+          </a:xfrm>
+          <a:prstGeom prst="roundRect">
+            <a:avLst/>
+          </a:prstGeom>
+          <a:solidFill>
+            <a:srgbClr val="FFFFFF"/>
+          </a:solidFill>
+          <a:ln w="15875">
+            <a:solidFill>
+              <a:srgbClr val="D95323"/>
+            </a:solidFill>
+          </a:ln>
+          <a:effectLst/>
+        </p:spPr>
+        <p:style>
+          <a:lnRef idx="1">
+            <a:schemeClr val="accent1"/>
+          </a:lnRef>
+          <a:fillRef idx="3">
+            <a:schemeClr val="accent1"/>
+          </a:fillRef>
+          <a:effectRef idx="2">
+            <a:schemeClr val="accent1"/>
+          </a:effectRef>
+          <a:fontRef idx="minor">
+            <a:schemeClr val="lt1"/>
+          </a:fontRef>
+        </p:style>
+        <p:txBody>
+          <a:bodyPr rtlCol="0" anchor="ctr"/>
+          <a:lstStyle/>
+          <a:p>
+            <a:pPr algn="ctr"/>
+          </a:p>
+        </p:txBody>
+      </p:sp>
+      <p:sp>
+        <p:nvSpPr>
+          <p:cNvPr id="59" name="TextBox 58"/>
+          <p:cNvSpPr txBox="1"/>
+          <p:nvPr/>
+        </p:nvSpPr>
+        <p:spPr>
+          <a:xfrm>
+            <a:off x="7040880" y="4553712"/>
+            <a:ext cx="4526280" cy="960120"/>
+          </a:xfrm>
+          <a:prstGeom prst="rect">
+            <a:avLst/>
+          </a:prstGeom>
+          <a:noFill/>
+        </p:spPr>
+        <p:txBody>
+          <a:bodyPr wrap="square" anchor="ctr" lIns="27432" rIns="27432" tIns="9144" bIns="9144">
+            <a:spAutoFit/>
+          </a:bodyPr>
+          <a:lstStyle/>
+          <a:p>
+            <a:pPr algn="l">
+              <a:spcBef>
+                <a:spcPts val="0"/>
+              </a:spcBef>
+              <a:spcAft>
+                <a:spcPts val="200"/>
+              </a:spcAft>
+            </a:pPr>
+            <a:r>
+              <a:rPr sz="1300" b="1" i="0">
+                <a:solidFill>
+                  <a:srgbClr val="D95323"/>
+                </a:solidFill>
+                <a:latin typeface="Tahoma"/>
+              </a:rPr>
+              <a:t>Backup นอกไซต์ (data center ที่ 2)</a:t>
+            </a:r>
+          </a:p>
+          <a:p>
+            <a:pPr algn="l">
+              <a:spcBef>
+                <a:spcPts val="0"/>
+              </a:spcBef>
+              <a:spcAft>
+                <a:spcPts val="200"/>
+              </a:spcAft>
+            </a:pPr>
+            <a:r>
+              <a:rPr sz="1100" b="0" i="0">
+                <a:solidFill>
+                  <a:srgbClr val="0D3D14"/>
+                </a:solidFill>
+                <a:latin typeface="Tahoma"/>
+              </a:rPr>
+              <a:t>ฐานข้อมูล + ไฟล์ทุกวัน · ทดลองกู้คืนจริงปีละครั้ง</a:t>
+            </a:r>
+          </a:p>
+        </p:txBody>
+      </p:sp>
+      <p:sp>
+        <p:nvSpPr>
+          <p:cNvPr id="60" name="TextBox 59"/>
+          <p:cNvSpPr txBox="1"/>
+          <p:nvPr/>
+        </p:nvSpPr>
+        <p:spPr>
+          <a:xfrm>
+            <a:off x="3931920" y="4937760"/>
+            <a:ext cx="2697480" cy="822960"/>
+          </a:xfrm>
+          <a:prstGeom prst="rect">
+            <a:avLst/>
+          </a:prstGeom>
+          <a:noFill/>
+        </p:spPr>
+        <p:txBody>
+          <a:bodyPr wrap="square" anchor="t" lIns="27432" rIns="27432" tIns="9144" bIns="9144">
+            <a:spAutoFit/>
+          </a:bodyPr>
+          <a:lstStyle/>
+          <a:p>
+            <a:pPr algn="l">
+              <a:spcBef>
+                <a:spcPts val="0"/>
+              </a:spcBef>
+              <a:spcAft>
+                <a:spcPts val="300"/>
+              </a:spcAft>
+            </a:pPr>
+            <a:r>
+              <a:rPr sz="1100" b="1" i="0">
+                <a:solidFill>
+                  <a:srgbClr val="0D3D14"/>
+                </a:solidFill>
+                <a:latin typeface="Tahoma"/>
+              </a:rPr>
+              <a:t>กล่อง Edge: </a:t>
+            </a:r>
+            <a:r>
+              <a:rPr sz="1100" b="0" i="0">
+                <a:solidFill>
+                  <a:srgbClr val="555555"/>
+                </a:solidFill>
+                <a:latin typeface="Tahoma"/>
+              </a:rPr>
+              <a:t>รับสัญญาณเครื่องจักร + ไฟล์ EDI ส่งเข้าศูนย์</a:t>
+            </a:r>
+          </a:p>
+          <a:p>
+            <a:pPr algn="l">
+              <a:spcBef>
+                <a:spcPts val="0"/>
+              </a:spcBef>
+              <a:spcAft>
+                <a:spcPts val="300"/>
+              </a:spcAft>
+            </a:pPr>
+            <a:r>
+              <a:rPr sz="1100" b="1" i="0">
+                <a:solidFill>
+                  <a:srgbClr val="0D3D14"/>
+                </a:solidFill>
+                <a:latin typeface="Tahoma"/>
+              </a:rPr>
+              <a:t>ภายนอก: </a:t>
+            </a:r>
+            <a:r>
+              <a:rPr sz="1100" b="0" i="0">
+                <a:solidFill>
+                  <a:srgbClr val="555555"/>
+                </a:solidFill>
+                <a:latin typeface="Tahoma"/>
+              </a:rPr>
+              <a:t>Telegram · Push · GitHub</a:t>
+            </a:r>
+          </a:p>
+        </p:txBody>
+      </p:sp>
+      <p:sp>
+        <p:nvSpPr>
+          <p:cNvPr id="61" name="Rounded Rectangle 60"/>
+          <p:cNvSpPr/>
+          <p:nvPr/>
+        </p:nvSpPr>
+        <p:spPr>
+          <a:xfrm>
+            <a:off x="365760" y="5806440"/>
+            <a:ext cx="11430000" cy="411480"/>
+          </a:xfrm>
+          <a:prstGeom prst="roundRect">
+            <a:avLst/>
+          </a:prstGeom>
+          <a:solidFill>
+            <a:srgbClr val="0D3D14"/>
+          </a:solidFill>
+          <a:ln>
+            <a:noFill/>
+          </a:ln>
+          <a:effectLst/>
+        </p:spPr>
+        <p:style>
+          <a:lnRef idx="1">
+            <a:schemeClr val="accent1"/>
+          </a:lnRef>
+          <a:fillRef idx="3">
+            <a:schemeClr val="accent1"/>
+          </a:fillRef>
+          <a:effectRef idx="2">
+            <a:schemeClr val="accent1"/>
+          </a:effectRef>
+          <a:fontRef idx="minor">
+            <a:schemeClr val="lt1"/>
+          </a:fontRef>
+        </p:style>
+        <p:txBody>
+          <a:bodyPr rtlCol="0" anchor="ctr"/>
+          <a:lstStyle/>
+          <a:p>
+            <a:pPr algn="ctr"/>
+          </a:p>
+        </p:txBody>
+      </p:sp>
+      <p:sp>
+        <p:nvSpPr>
+          <p:cNvPr id="62" name="TextBox 61"/>
+          <p:cNvSpPr txBox="1"/>
+          <p:nvPr/>
+        </p:nvSpPr>
+        <p:spPr>
+          <a:xfrm>
+            <a:off x="502920" y="5806440"/>
+            <a:ext cx="11155680" cy="411480"/>
+          </a:xfrm>
+          <a:prstGeom prst="rect">
+            <a:avLst/>
+          </a:prstGeom>
+          <a:noFill/>
+        </p:spPr>
+        <p:txBody>
+          <a:bodyPr wrap="square" anchor="ctr" lIns="27432" rIns="27432" tIns="9144" bIns="9144">
+            <a:spAutoFit/>
+          </a:bodyPr>
+          <a:lstStyle/>
+          <a:p>
+            <a:pPr algn="l">
+              <a:spcBef>
+                <a:spcPts val="0"/>
+              </a:spcBef>
+              <a:spcAft>
+                <a:spcPts val="200"/>
+              </a:spcAft>
+            </a:pPr>
+            <a:r>
+              <a:rPr sz="1400" b="1" i="0">
+                <a:solidFill>
+                  <a:srgbClr val="FFFFFF"/>
+                </a:solidFill>
+                <a:latin typeface="Tahoma"/>
+              </a:rPr>
+              <a:t>เพิ่มโรงงาน = เพิ่มรหัสบริษัท + ผู้ใช้ + ทะเบียน  ·  ไม่ต้องตั้งเซิร์ฟเวอร์ใหม่ทุกโรงงาน</a:t>
+            </a:r>
+          </a:p>
+        </p:txBody>
+      </p:sp>
+    </p:spTree>
+  </p:cSld>
+  <p:clrMapOvr>
+    <a:masterClrMapping/>
+  </p:clrMapOvr>
+</p:sld>
+</file>
+
+<file path=ppt/slides/slide6.xml><?xml version="1.0" encoding="utf-8"?>
+<p:sld xmlns:a="http://schemas.openxmlformats.org/drawingml/2006/main" xmlns:p="http://schemas.openxmlformats.org/presentationml/2006/main" xmlns:r="http://schemas.openxmlformats.org/officeDocument/2006/relationships">
+  <p:cSld>
+    <p:spTree>
+      <p:nvGrpSpPr>
+        <p:cNvPr id="1" name=""/>
+        <p:cNvGrpSpPr/>
+        <p:nvPr/>
+      </p:nvGrpSpPr>
+      <p:grpSpPr/>
+      <p:sp>
+        <p:nvSpPr>
+          <p:cNvPr id="2" name="TextBox 1"/>
+          <p:cNvSpPr txBox="1"/>
+          <p:nvPr/>
+        </p:nvSpPr>
+        <p:spPr>
+          <a:xfrm>
+            <a:off x="256032" y="256032"/>
+            <a:ext cx="11430000" cy="649224"/>
+          </a:xfrm>
+          <a:prstGeom prst="rect">
+            <a:avLst/>
+          </a:prstGeom>
+          <a:noFill/>
+        </p:spPr>
+        <p:txBody>
+          <a:bodyPr wrap="square" anchor="t" lIns="27432" rIns="27432" tIns="9144" bIns="9144">
+            <a:spAutoFit/>
+          </a:bodyPr>
+          <a:lstStyle/>
+          <a:p>
+            <a:pPr algn="l">
+              <a:spcBef>
+                <a:spcPts val="0"/>
+              </a:spcBef>
+              <a:spcAft>
+                <a:spcPts val="200"/>
+              </a:spcAft>
+            </a:pPr>
+            <a:r>
+              <a:rPr sz="3100" b="1" i="0">
+                <a:solidFill>
+                  <a:srgbClr val="068734"/>
+                </a:solidFill>
+                <a:latin typeface="Tahoma"/>
+              </a:rPr>
+              <a:t>ขยายทีละขั้น · อะไรใช้ร่วม อะไรแยกต่อโรงงาน</a:t>
+            </a:r>
+          </a:p>
+        </p:txBody>
+      </p:sp>
+      <p:pic>
+        <p:nvPicPr>
+          <p:cNvPr id="3" name="Picture 2" descr="logo_r01.png"/>
+          <p:cNvPicPr>
+            <a:picLocks noChangeAspect="1"/>
+          </p:cNvPicPr>
+          <p:nvPr/>
+        </p:nvPicPr>
+        <p:blipFill>
+          <a:blip r:embed="rId2"/>
+          <a:stretch>
+            <a:fillRect/>
+          </a:stretch>
+        </p:blipFill>
+        <p:spPr>
+          <a:xfrm>
+            <a:off x="249631" y="6448348"/>
+            <a:ext cx="237744" cy="237744"/>
+          </a:xfrm>
+          <a:prstGeom prst="rect">
+            <a:avLst/>
+          </a:prstGeom>
+        </p:spPr>
+      </p:pic>
+      <p:sp>
+        <p:nvSpPr>
+          <p:cNvPr id="4" name="TextBox 3"/>
+          <p:cNvSpPr txBox="1"/>
+          <p:nvPr/>
+        </p:nvSpPr>
+        <p:spPr>
+          <a:xfrm>
+            <a:off x="566928" y="6353251"/>
+            <a:ext cx="3246120" cy="400507"/>
+          </a:xfrm>
+          <a:prstGeom prst="rect">
+            <a:avLst/>
+          </a:prstGeom>
+          <a:noFill/>
+        </p:spPr>
+        <p:txBody>
+          <a:bodyPr wrap="square" anchor="ctr" lIns="27432" rIns="27432" tIns="9144" bIns="9144">
+            <a:spAutoFit/>
+          </a:bodyPr>
+          <a:lstStyle/>
+          <a:p>
+            <a:pPr algn="l">
+              <a:spcBef>
+                <a:spcPts val="0"/>
+              </a:spcBef>
+              <a:spcAft>
+                <a:spcPts val="200"/>
+              </a:spcAft>
+            </a:pPr>
+            <a:r>
+              <a:rPr sz="2000" b="1" i="0">
+                <a:solidFill>
+                  <a:srgbClr val="068734"/>
+                </a:solidFill>
+                <a:latin typeface="Tahoma"/>
+              </a:rPr>
+              <a:t>THAI SUMMIT GROUP</a:t>
+            </a:r>
+          </a:p>
+        </p:txBody>
+      </p:sp>
+      <p:sp>
+        <p:nvSpPr>
+          <p:cNvPr id="5" name="TextBox 4"/>
+          <p:cNvSpPr txBox="1"/>
+          <p:nvPr/>
+        </p:nvSpPr>
+        <p:spPr>
+          <a:xfrm>
+            <a:off x="9400032" y="6510528"/>
+            <a:ext cx="2514600" cy="292608"/>
+          </a:xfrm>
+          <a:prstGeom prst="rect">
+            <a:avLst/>
+          </a:prstGeom>
+          <a:noFill/>
+        </p:spPr>
+        <p:txBody>
+          <a:bodyPr wrap="square" anchor="t" lIns="27432" rIns="27432" tIns="9144" bIns="9144">
+            <a:spAutoFit/>
+          </a:bodyPr>
+          <a:lstStyle/>
+          <a:p>
+            <a:pPr algn="r">
+              <a:spcBef>
+                <a:spcPts val="0"/>
+              </a:spcBef>
+              <a:spcAft>
+                <a:spcPts val="200"/>
+              </a:spcAft>
+            </a:pPr>
+            <a:r>
+              <a:rPr sz="1200" b="0" i="0">
+                <a:solidFill>
+                  <a:srgbClr val="068734"/>
+                </a:solidFill>
+                <a:latin typeface="Tahoma"/>
+              </a:rPr>
+              <a:t>6</a:t>
+            </a:r>
+          </a:p>
+        </p:txBody>
+      </p:sp>
+      <p:sp>
+        <p:nvSpPr>
+          <p:cNvPr id="6" name="Rounded Rectangle 5"/>
+          <p:cNvSpPr/>
+          <p:nvPr/>
+        </p:nvSpPr>
+        <p:spPr>
+          <a:xfrm>
+            <a:off x="457200" y="1417320"/>
+            <a:ext cx="3657600" cy="2331720"/>
+          </a:xfrm>
+          <a:prstGeom prst="roundRect">
+            <a:avLst/>
+          </a:prstGeom>
+          <a:solidFill>
+            <a:srgbClr val="FFFFFF"/>
+          </a:solidFill>
+          <a:ln w="25400">
+            <a:solidFill>
+              <a:srgbClr val="D95323"/>
+            </a:solidFill>
+          </a:ln>
+          <a:effectLst/>
+          <a:effectLst>
+            <a:outerShdw blurRad="50000" dist="20000" dir="5400000" rotWithShape="0">
+              <a:srgbClr val="8A99AD">
+                <a:alpha val="30000"/>
+              </a:srgbClr>
+            </a:outerShdw>
+          </a:effectLst>
+        </p:spPr>
+        <p:style>
+          <a:lnRef idx="1">
+            <a:schemeClr val="accent1"/>
+          </a:lnRef>
+          <a:fillRef idx="3">
+            <a:schemeClr val="accent1"/>
+          </a:fillRef>
+          <a:effectRef idx="2">
+            <a:schemeClr val="accent1"/>
+          </a:effectRef>
+          <a:fontRef idx="minor">
+            <a:schemeClr val="lt1"/>
+          </a:fontRef>
+        </p:style>
+        <p:txBody>
+          <a:bodyPr rtlCol="0" anchor="ctr"/>
+          <a:lstStyle/>
+          <a:p>
+            <a:pPr algn="ctr"/>
+          </a:p>
+        </p:txBody>
+      </p:sp>
+      <p:sp>
+        <p:nvSpPr>
+          <p:cNvPr id="7" name="Rectangle 6"/>
+          <p:cNvSpPr/>
+          <p:nvPr/>
+        </p:nvSpPr>
+        <p:spPr>
+          <a:xfrm>
+            <a:off x="457200" y="1417320"/>
+            <a:ext cx="3657600" cy="457200"/>
+          </a:xfrm>
+          <a:prstGeom prst="rect">
+            <a:avLst/>
+          </a:prstGeom>
+          <a:solidFill>
+            <a:srgbClr val="D95323"/>
+          </a:solidFill>
+          <a:ln>
+            <a:noFill/>
+          </a:ln>
+          <a:effectLst/>
+        </p:spPr>
+        <p:style>
+          <a:lnRef idx="1">
+            <a:schemeClr val="accent1"/>
+          </a:lnRef>
+          <a:fillRef idx="3">
+            <a:schemeClr val="accent1"/>
+          </a:fillRef>
+          <a:effectRef idx="2">
+            <a:schemeClr val="accent1"/>
+          </a:effectRef>
+          <a:fontRef idx="minor">
+            <a:schemeClr val="lt1"/>
+          </a:fontRef>
+        </p:style>
+        <p:txBody>
+          <a:bodyPr rtlCol="0" anchor="ctr"/>
+          <a:lstStyle/>
+          <a:p>
+            <a:pPr algn="ctr"/>
+          </a:p>
+        </p:txBody>
+      </p:sp>
+      <p:sp>
+        <p:nvSpPr>
+          <p:cNvPr id="8" name="TextBox 7"/>
+          <p:cNvSpPr txBox="1"/>
+          <p:nvPr/>
+        </p:nvSpPr>
+        <p:spPr>
+          <a:xfrm>
+            <a:off x="457200" y="1417320"/>
+            <a:ext cx="3657600" cy="457200"/>
+          </a:xfrm>
+          <a:prstGeom prst="rect">
+            <a:avLst/>
+          </a:prstGeom>
+          <a:noFill/>
+        </p:spPr>
+        <p:txBody>
+          <a:bodyPr wrap="square" anchor="ctr" lIns="27432" rIns="27432" tIns="9144" bIns="9144">
+            <a:spAutoFit/>
+          </a:bodyPr>
+          <a:lstStyle/>
+          <a:p>
+            <a:pPr algn="ctr">
+              <a:spcBef>
+                <a:spcPts val="0"/>
+              </a:spcBef>
+              <a:spcAft>
+                <a:spcPts val="200"/>
+              </a:spcAft>
+            </a:pPr>
+            <a:r>
+              <a:rPr sz="1500" b="1" i="0">
+                <a:solidFill>
+                  <a:srgbClr val="FFFFFF"/>
+                </a:solidFill>
+                <a:latin typeface="Tahoma"/>
+              </a:rPr>
+              <a:t>ขั้น 1  ·  TSAT4 ย้ายขึ้น INET</a:t>
+            </a:r>
+          </a:p>
+        </p:txBody>
+      </p:sp>
+      <p:sp>
+        <p:nvSpPr>
+          <p:cNvPr id="9" name="TextBox 8"/>
+          <p:cNvSpPr txBox="1"/>
+          <p:nvPr/>
+        </p:nvSpPr>
+        <p:spPr>
+          <a:xfrm>
+            <a:off x="685800" y="2011680"/>
+            <a:ext cx="3200400" cy="1645920"/>
+          </a:xfrm>
+          <a:prstGeom prst="rect">
+            <a:avLst/>
+          </a:prstGeom>
+          <a:noFill/>
+        </p:spPr>
+        <p:txBody>
+          <a:bodyPr wrap="square" anchor="t" lIns="27432" rIns="27432" tIns="9144" bIns="9144">
+            <a:spAutoFit/>
+          </a:bodyPr>
+          <a:lstStyle/>
+          <a:p>
+            <a:pPr algn="l">
+              <a:spcBef>
+                <a:spcPts val="0"/>
+              </a:spcBef>
+              <a:spcAft>
+                <a:spcPts val="800"/>
+              </a:spcAft>
+            </a:pPr>
+            <a:r>
+              <a:rPr sz="1300" b="0" i="0">
+                <a:solidFill>
+                  <a:srgbClr val="068734"/>
+                </a:solidFill>
+                <a:latin typeface="Tahoma"/>
+              </a:rPr>
+              <a:t>•  เครื่องตามผังไอที</a:t>
+            </a:r>
+          </a:p>
+          <a:p>
+            <a:pPr algn="l">
+              <a:spcBef>
+                <a:spcPts val="0"/>
+              </a:spcBef>
+              <a:spcAft>
+                <a:spcPts val="800"/>
+              </a:spcAft>
+            </a:pPr>
+            <a:r>
+              <a:rPr sz="1300" b="0" i="0">
+                <a:solidFill>
+                  <a:srgbClr val="068734"/>
+                </a:solidFill>
+                <a:latin typeface="Tahoma"/>
+              </a:rPr>
+              <a:t>•  pipeline อัปเดตอัตโนมัติ</a:t>
+            </a:r>
+          </a:p>
+          <a:p>
+            <a:pPr algn="l">
+              <a:spcBef>
+                <a:spcPts val="0"/>
+              </a:spcBef>
+              <a:spcAft>
+                <a:spcPts val="800"/>
+              </a:spcAft>
+            </a:pPr>
+            <a:r>
+              <a:rPr sz="1300" b="0" i="0">
+                <a:solidFill>
+                  <a:srgbClr val="068734"/>
+                </a:solidFill>
+                <a:latin typeface="Tahoma"/>
+              </a:rPr>
+              <a:t>•  backup + มือถือเข้าได้</a:t>
+            </a:r>
+          </a:p>
+        </p:txBody>
+      </p:sp>
+      <p:sp>
+        <p:nvSpPr>
+          <p:cNvPr id="10" name="Rounded Rectangle 9"/>
+          <p:cNvSpPr/>
+          <p:nvPr/>
+        </p:nvSpPr>
+        <p:spPr>
+          <a:xfrm>
+            <a:off x="4251960" y="1417320"/>
+            <a:ext cx="3657600" cy="2331720"/>
+          </a:xfrm>
+          <a:prstGeom prst="roundRect">
+            <a:avLst/>
+          </a:prstGeom>
+          <a:solidFill>
+            <a:srgbClr val="FFFFFF"/>
+          </a:solidFill>
+          <a:ln w="9525">
+            <a:solidFill>
+              <a:srgbClr val="D9D9D9"/>
+            </a:solidFill>
+          </a:ln>
+          <a:effectLst/>
+          <a:effectLst>
+            <a:outerShdw blurRad="50000" dist="20000" dir="5400000" rotWithShape="0">
+              <a:srgbClr val="8A99AD">
+                <a:alpha val="30000"/>
+              </a:srgbClr>
+            </a:outerShdw>
+          </a:effectLst>
+        </p:spPr>
+        <p:style>
+          <a:lnRef idx="1">
+            <a:schemeClr val="accent1"/>
+          </a:lnRef>
+          <a:fillRef idx="3">
+            <a:schemeClr val="accent1"/>
+          </a:fillRef>
+          <a:effectRef idx="2">
+            <a:schemeClr val="accent1"/>
+          </a:effectRef>
+          <a:fontRef idx="minor">
+            <a:schemeClr val="lt1"/>
+          </a:fontRef>
+        </p:style>
+        <p:txBody>
+          <a:bodyPr rtlCol="0" anchor="ctr"/>
+          <a:lstStyle/>
+          <a:p>
+            <a:pPr algn="ctr"/>
+          </a:p>
+        </p:txBody>
+      </p:sp>
+      <p:sp>
+        <p:nvSpPr>
+          <p:cNvPr id="11" name="Rectangle 10"/>
+          <p:cNvSpPr/>
+          <p:nvPr/>
+        </p:nvSpPr>
+        <p:spPr>
+          <a:xfrm>
+            <a:off x="4251960" y="1417320"/>
+            <a:ext cx="3657600" cy="457200"/>
+          </a:xfrm>
+          <a:prstGeom prst="rect">
+            <a:avLst/>
+          </a:prstGeom>
+          <a:solidFill>
+            <a:srgbClr val="0D3D14"/>
+          </a:solidFill>
+          <a:ln>
+            <a:noFill/>
+          </a:ln>
+          <a:effectLst/>
+        </p:spPr>
+        <p:style>
+          <a:lnRef idx="1">
+            <a:schemeClr val="accent1"/>
+          </a:lnRef>
+          <a:fillRef idx="3">
+            <a:schemeClr val="accent1"/>
+          </a:fillRef>
+          <a:effectRef idx="2">
+            <a:schemeClr val="accent1"/>
+          </a:effectRef>
+          <a:fontRef idx="minor">
+            <a:schemeClr val="lt1"/>
+          </a:fontRef>
+        </p:style>
+        <p:txBody>
+          <a:bodyPr rtlCol="0" anchor="ctr"/>
+          <a:lstStyle/>
+          <a:p>
+            <a:pPr algn="ctr"/>
+          </a:p>
+        </p:txBody>
+      </p:sp>
+      <p:sp>
+        <p:nvSpPr>
+          <p:cNvPr id="12" name="TextBox 11"/>
+          <p:cNvSpPr txBox="1"/>
+          <p:nvPr/>
+        </p:nvSpPr>
+        <p:spPr>
+          <a:xfrm>
+            <a:off x="4251960" y="1417320"/>
+            <a:ext cx="3657600" cy="457200"/>
+          </a:xfrm>
+          <a:prstGeom prst="rect">
+            <a:avLst/>
+          </a:prstGeom>
+          <a:noFill/>
+        </p:spPr>
+        <p:txBody>
+          <a:bodyPr wrap="square" anchor="ctr" lIns="27432" rIns="27432" tIns="9144" bIns="9144">
+            <a:spAutoFit/>
+          </a:bodyPr>
+          <a:lstStyle/>
+          <a:p>
+            <a:pPr algn="ctr">
+              <a:spcBef>
+                <a:spcPts val="0"/>
+              </a:spcBef>
+              <a:spcAft>
+                <a:spcPts val="200"/>
+              </a:spcAft>
+            </a:pPr>
+            <a:r>
+              <a:rPr sz="1500" b="1" i="0">
+                <a:solidFill>
+                  <a:srgbClr val="FFFFFF"/>
+                </a:solidFill>
+                <a:latin typeface="Tahoma"/>
+              </a:rPr>
+              <a:t>ขั้น 2  ·  เตรียมรองรับหลายบริษัท</a:t>
+            </a:r>
+          </a:p>
+        </p:txBody>
+      </p:sp>
+      <p:sp>
+        <p:nvSpPr>
+          <p:cNvPr id="13" name="TextBox 12"/>
+          <p:cNvSpPr txBox="1"/>
+          <p:nvPr/>
+        </p:nvSpPr>
+        <p:spPr>
+          <a:xfrm>
+            <a:off x="4480560" y="2011680"/>
+            <a:ext cx="3200400" cy="1645920"/>
+          </a:xfrm>
+          <a:prstGeom prst="rect">
+            <a:avLst/>
+          </a:prstGeom>
+          <a:noFill/>
+        </p:spPr>
+        <p:txBody>
+          <a:bodyPr wrap="square" anchor="t" lIns="27432" rIns="27432" tIns="9144" bIns="9144">
+            <a:spAutoFit/>
+          </a:bodyPr>
+          <a:lstStyle/>
+          <a:p>
+            <a:pPr algn="l">
+              <a:spcBef>
+                <a:spcPts val="0"/>
+              </a:spcBef>
+              <a:spcAft>
+                <a:spcPts val="800"/>
+              </a:spcAft>
+            </a:pPr>
+            <a:r>
+              <a:rPr sz="1300" b="0" i="0">
+                <a:solidFill>
+                  <a:srgbClr val="068734"/>
+                </a:solidFill>
+                <a:latin typeface="Tahoma"/>
+              </a:rPr>
+              <a:t>•  ใส่ company_id + สิทธิ์ต่อบริษัท</a:t>
+            </a:r>
+          </a:p>
+          <a:p>
+            <a:pPr algn="l">
+              <a:spcBef>
+                <a:spcPts val="0"/>
+              </a:spcBef>
+              <a:spcAft>
+                <a:spcPts val="800"/>
+              </a:spcAft>
+            </a:pPr>
+            <a:r>
+              <a:rPr sz="1300" b="0" i="0">
+                <a:solidFill>
+                  <a:srgbClr val="068734"/>
+                </a:solidFill>
+                <a:latin typeface="Tahoma"/>
+              </a:rPr>
+              <a:t>•  ปิดช่องโหว่ฐานข้อมูล DR</a:t>
+            </a:r>
+          </a:p>
+          <a:p>
+            <a:pPr algn="l">
+              <a:spcBef>
+                <a:spcPts val="0"/>
+              </a:spcBef>
+              <a:spcAft>
+                <a:spcPts val="800"/>
+              </a:spcAft>
+            </a:pPr>
+            <a:r>
+              <a:rPr sz="1300" b="0" i="0">
+                <a:solidFill>
+                  <a:srgbClr val="068734"/>
+                </a:solidFill>
+                <a:latin typeface="Tahoma"/>
+              </a:rPr>
+              <a:t>•  SSO ด้วยบัญชี M365</a:t>
+            </a:r>
+          </a:p>
+        </p:txBody>
+      </p:sp>
+      <p:sp>
+        <p:nvSpPr>
+          <p:cNvPr id="14" name="Rounded Rectangle 13"/>
+          <p:cNvSpPr/>
+          <p:nvPr/>
+        </p:nvSpPr>
+        <p:spPr>
+          <a:xfrm>
+            <a:off x="8046720" y="1417320"/>
+            <a:ext cx="3657600" cy="2331720"/>
+          </a:xfrm>
+          <a:prstGeom prst="roundRect">
+            <a:avLst/>
+          </a:prstGeom>
+          <a:solidFill>
+            <a:srgbClr val="FFFFFF"/>
+          </a:solidFill>
+          <a:ln w="9525">
+            <a:solidFill>
+              <a:srgbClr val="D9D9D9"/>
+            </a:solidFill>
+          </a:ln>
+          <a:effectLst/>
+          <a:effectLst>
+            <a:outerShdw blurRad="50000" dist="20000" dir="5400000" rotWithShape="0">
+              <a:srgbClr val="8A99AD">
+                <a:alpha val="30000"/>
+              </a:srgbClr>
+            </a:outerShdw>
+          </a:effectLst>
+        </p:spPr>
+        <p:style>
+          <a:lnRef idx="1">
+            <a:schemeClr val="accent1"/>
+          </a:lnRef>
+          <a:fillRef idx="3">
+            <a:schemeClr val="accent1"/>
+          </a:fillRef>
+          <a:effectRef idx="2">
+            <a:schemeClr val="accent1"/>
+          </a:effectRef>
+          <a:fontRef idx="minor">
+            <a:schemeClr val="lt1"/>
+          </a:fontRef>
+        </p:style>
+        <p:txBody>
+          <a:bodyPr rtlCol="0" anchor="ctr"/>
+          <a:lstStyle/>
+          <a:p>
+            <a:pPr algn="ctr"/>
+          </a:p>
+        </p:txBody>
+      </p:sp>
+      <p:sp>
+        <p:nvSpPr>
+          <p:cNvPr id="15" name="Rectangle 14"/>
+          <p:cNvSpPr/>
+          <p:nvPr/>
+        </p:nvSpPr>
+        <p:spPr>
+          <a:xfrm>
+            <a:off x="8046720" y="1417320"/>
+            <a:ext cx="3657600" cy="457200"/>
+          </a:xfrm>
+          <a:prstGeom prst="rect">
+            <a:avLst/>
+          </a:prstGeom>
+          <a:solidFill>
+            <a:srgbClr val="0D3D14"/>
+          </a:solidFill>
+          <a:ln>
+            <a:noFill/>
+          </a:ln>
+          <a:effectLst/>
+        </p:spPr>
+        <p:style>
+          <a:lnRef idx="1">
+            <a:schemeClr val="accent1"/>
+          </a:lnRef>
+          <a:fillRef idx="3">
+            <a:schemeClr val="accent1"/>
+          </a:fillRef>
+          <a:effectRef idx="2">
+            <a:schemeClr val="accent1"/>
+          </a:effectRef>
+          <a:fontRef idx="minor">
+            <a:schemeClr val="lt1"/>
+          </a:fontRef>
+        </p:style>
+        <p:txBody>
+          <a:bodyPr rtlCol="0" anchor="ctr"/>
+          <a:lstStyle/>
+          <a:p>
+            <a:pPr algn="ctr"/>
+          </a:p>
+        </p:txBody>
+      </p:sp>
+      <p:sp>
+        <p:nvSpPr>
+          <p:cNvPr id="16" name="TextBox 15"/>
+          <p:cNvSpPr txBox="1"/>
+          <p:nvPr/>
+        </p:nvSpPr>
+        <p:spPr>
+          <a:xfrm>
+            <a:off x="8046720" y="1417320"/>
+            <a:ext cx="3657600" cy="457200"/>
+          </a:xfrm>
+          <a:prstGeom prst="rect">
+            <a:avLst/>
+          </a:prstGeom>
+          <a:noFill/>
+        </p:spPr>
+        <p:txBody>
+          <a:bodyPr wrap="square" anchor="ctr" lIns="27432" rIns="27432" tIns="9144" bIns="9144">
+            <a:spAutoFit/>
+          </a:bodyPr>
+          <a:lstStyle/>
+          <a:p>
+            <a:pPr algn="ctr">
+              <a:spcBef>
+                <a:spcPts val="0"/>
+              </a:spcBef>
+              <a:spcAft>
+                <a:spcPts val="200"/>
+              </a:spcAft>
+            </a:pPr>
+            <a:r>
+              <a:rPr sz="1500" b="1" i="0">
+                <a:solidFill>
+                  <a:srgbClr val="FFFFFF"/>
+                </a:solidFill>
+                <a:latin typeface="Tahoma"/>
+              </a:rPr>
+              <a:t>ขั้น 3  ·  โรงงานนำร่องที่ 2</a:t>
+            </a:r>
+          </a:p>
+        </p:txBody>
+      </p:sp>
+      <p:sp>
+        <p:nvSpPr>
+          <p:cNvPr id="17" name="TextBox 16"/>
+          <p:cNvSpPr txBox="1"/>
+          <p:nvPr/>
+        </p:nvSpPr>
+        <p:spPr>
+          <a:xfrm>
+            <a:off x="8275320" y="2011680"/>
+            <a:ext cx="3200400" cy="1645920"/>
+          </a:xfrm>
+          <a:prstGeom prst="rect">
+            <a:avLst/>
+          </a:prstGeom>
+          <a:noFill/>
+        </p:spPr>
+        <p:txBody>
+          <a:bodyPr wrap="square" anchor="t" lIns="27432" rIns="27432" tIns="9144" bIns="9144">
+            <a:spAutoFit/>
+          </a:bodyPr>
+          <a:lstStyle/>
+          <a:p>
+            <a:pPr algn="l">
+              <a:spcBef>
+                <a:spcPts val="0"/>
+              </a:spcBef>
+              <a:spcAft>
+                <a:spcPts val="800"/>
+              </a:spcAft>
+            </a:pPr>
+            <a:r>
+              <a:rPr sz="1300" b="0" i="0">
+                <a:solidFill>
+                  <a:srgbClr val="068734"/>
+                </a:solidFill>
+                <a:latin typeface="Tahoma"/>
+              </a:rPr>
+              <a:t>•  VPN + กล่อง Edge ที่ไซต์</a:t>
+            </a:r>
+          </a:p>
+          <a:p>
+            <a:pPr algn="l">
+              <a:spcBef>
+                <a:spcPts val="0"/>
+              </a:spcBef>
+              <a:spcAft>
+                <a:spcPts val="800"/>
+              </a:spcAft>
+            </a:pPr>
+            <a:r>
+              <a:rPr sz="1300" b="0" i="0">
+                <a:solidFill>
+                  <a:srgbClr val="068734"/>
+                </a:solidFill>
+                <a:latin typeface="Tahoma"/>
+              </a:rPr>
+              <a:t>•  ขยายเป็น 3 เครื่อง</a:t>
+            </a:r>
+          </a:p>
+          <a:p>
+            <a:pPr algn="l">
+              <a:spcBef>
+                <a:spcPts val="0"/>
+              </a:spcBef>
+              <a:spcAft>
+                <a:spcPts val="800"/>
+              </a:spcAft>
+            </a:pPr>
+            <a:r>
+              <a:rPr sz="1300" b="0" i="0">
+                <a:solidFill>
+                  <a:srgbClr val="068734"/>
+                </a:solidFill>
+                <a:latin typeface="Tahoma"/>
+              </a:rPr>
+              <a:t>•  แล้วค่อยเพิ่มทีละโรงงาน</a:t>
+            </a:r>
+          </a:p>
+        </p:txBody>
+      </p:sp>
+      <p:sp>
+        <p:nvSpPr>
+          <p:cNvPr id="18" name="Rounded Rectangle 17"/>
+          <p:cNvSpPr/>
+          <p:nvPr/>
+        </p:nvSpPr>
+        <p:spPr>
+          <a:xfrm>
+            <a:off x="457200" y="3977639"/>
+            <a:ext cx="5577840" cy="1691640"/>
+          </a:xfrm>
+          <a:prstGeom prst="roundRect">
+            <a:avLst/>
+          </a:prstGeom>
+          <a:solidFill>
+            <a:srgbClr val="F2F2F2"/>
+          </a:solidFill>
+          <a:ln>
+            <a:noFill/>
+          </a:ln>
+          <a:effectLst/>
+        </p:spPr>
+        <p:style>
+          <a:lnRef idx="1">
+            <a:schemeClr val="accent1"/>
+          </a:lnRef>
+          <a:fillRef idx="3">
+            <a:schemeClr val="accent1"/>
+          </a:fillRef>
+          <a:effectRef idx="2">
+            <a:schemeClr val="accent1"/>
+          </a:effectRef>
+          <a:fontRef idx="minor">
+            <a:schemeClr val="lt1"/>
+          </a:fontRef>
+        </p:style>
+        <p:txBody>
+          <a:bodyPr rtlCol="0" anchor="ctr"/>
+          <a:lstStyle/>
+          <a:p>
+            <a:pPr algn="ctr"/>
+          </a:p>
+        </p:txBody>
+      </p:sp>
+      <p:sp>
+        <p:nvSpPr>
+          <p:cNvPr id="19" name="Rectangle 18"/>
+          <p:cNvSpPr/>
+          <p:nvPr/>
+        </p:nvSpPr>
+        <p:spPr>
+          <a:xfrm>
+            <a:off x="457200" y="3977639"/>
+            <a:ext cx="128016" cy="1691640"/>
+          </a:xfrm>
+          <a:prstGeom prst="rect">
             <a:avLst/>
           </a:prstGeom>
           <a:solidFill>
@@ -8886,14 +12476,426 @@
       </p:sp>
       <p:sp>
         <p:nvSpPr>
-          <p:cNvPr id="9" name="TextBox 8"/>
+          <p:cNvPr id="20" name="TextBox 19"/>
           <p:cNvSpPr txBox="1"/>
           <p:nvPr/>
         </p:nvSpPr>
         <p:spPr>
           <a:xfrm>
-            <a:off x="685800" y="2112264"/>
-            <a:ext cx="384048" cy="384048"/>
+            <a:off x="777240" y="4041648"/>
+            <a:ext cx="5120640" cy="1600200"/>
+          </a:xfrm>
+          <a:prstGeom prst="rect">
+            <a:avLst/>
+          </a:prstGeom>
+          <a:noFill/>
+        </p:spPr>
+        <p:txBody>
+          <a:bodyPr wrap="square" anchor="t" lIns="27432" rIns="27432" tIns="9144" bIns="9144">
+            <a:spAutoFit/>
+          </a:bodyPr>
+          <a:lstStyle/>
+          <a:p>
+            <a:pPr algn="l">
+              <a:spcBef>
+                <a:spcPts val="0"/>
+              </a:spcBef>
+              <a:spcAft>
+                <a:spcPts val="500"/>
+              </a:spcAft>
+            </a:pPr>
+            <a:r>
+              <a:rPr sz="1500" b="1" i="0">
+                <a:solidFill>
+                  <a:srgbClr val="068734"/>
+                </a:solidFill>
+                <a:latin typeface="Tahoma"/>
+              </a:rPr>
+              <a:t>ใช้ร่วมทุกโรงงาน</a:t>
+            </a:r>
+          </a:p>
+          <a:p>
+            <a:pPr algn="l">
+              <a:spcBef>
+                <a:spcPts val="0"/>
+              </a:spcBef>
+              <a:spcAft>
+                <a:spcPts val="500"/>
+              </a:spcAft>
+            </a:pPr>
+            <a:r>
+              <a:rPr sz="1300" b="0" i="0">
+                <a:solidFill>
+                  <a:srgbClr val="0D3D14"/>
+                </a:solidFill>
+                <a:latin typeface="Tahoma"/>
+              </a:rPr>
+              <a:t>•  โปรแกรม + สูตรคำนวณ (OEE ฯลฯ) ชุดเดียว</a:t>
+            </a:r>
+          </a:p>
+          <a:p>
+            <a:pPr algn="l">
+              <a:spcBef>
+                <a:spcPts val="0"/>
+              </a:spcBef>
+              <a:spcAft>
+                <a:spcPts val="500"/>
+              </a:spcAft>
+            </a:pPr>
+            <a:r>
+              <a:rPr sz="1300" b="0" i="0">
+                <a:solidFill>
+                  <a:srgbClr val="0D3D14"/>
+                </a:solidFill>
+                <a:latin typeface="Tahoma"/>
+              </a:rPr>
+              <a:t>•  เซิร์ฟเวอร์ · backup · ทีมดูแล</a:t>
+            </a:r>
+          </a:p>
+          <a:p>
+            <a:pPr algn="l">
+              <a:spcBef>
+                <a:spcPts val="0"/>
+              </a:spcBef>
+              <a:spcAft>
+                <a:spcPts val="500"/>
+              </a:spcAft>
+            </a:pPr>
+            <a:r>
+              <a:rPr sz="1300" b="0" i="0">
+                <a:solidFill>
+                  <a:srgbClr val="0D3D14"/>
+                </a:solidFill>
+                <a:latin typeface="Tahoma"/>
+              </a:rPr>
+              <a:t>•  ล็อกอิน SSO · จอรวมกลุ่ม</a:t>
+            </a:r>
+          </a:p>
+        </p:txBody>
+      </p:sp>
+      <p:sp>
+        <p:nvSpPr>
+          <p:cNvPr id="21" name="Rounded Rectangle 20"/>
+          <p:cNvSpPr/>
+          <p:nvPr/>
+        </p:nvSpPr>
+        <p:spPr>
+          <a:xfrm>
+            <a:off x="6172200" y="3977639"/>
+            <a:ext cx="5577840" cy="1691640"/>
+          </a:xfrm>
+          <a:prstGeom prst="roundRect">
+            <a:avLst/>
+          </a:prstGeom>
+          <a:solidFill>
+            <a:srgbClr val="F2F2F2"/>
+          </a:solidFill>
+          <a:ln>
+            <a:noFill/>
+          </a:ln>
+          <a:effectLst/>
+        </p:spPr>
+        <p:style>
+          <a:lnRef idx="1">
+            <a:schemeClr val="accent1"/>
+          </a:lnRef>
+          <a:fillRef idx="3">
+            <a:schemeClr val="accent1"/>
+          </a:fillRef>
+          <a:effectRef idx="2">
+            <a:schemeClr val="accent1"/>
+          </a:effectRef>
+          <a:fontRef idx="minor">
+            <a:schemeClr val="lt1"/>
+          </a:fontRef>
+        </p:style>
+        <p:txBody>
+          <a:bodyPr rtlCol="0" anchor="ctr"/>
+          <a:lstStyle/>
+          <a:p>
+            <a:pPr algn="ctr"/>
+          </a:p>
+        </p:txBody>
+      </p:sp>
+      <p:sp>
+        <p:nvSpPr>
+          <p:cNvPr id="22" name="Rectangle 21"/>
+          <p:cNvSpPr/>
+          <p:nvPr/>
+        </p:nvSpPr>
+        <p:spPr>
+          <a:xfrm>
+            <a:off x="6172200" y="3977639"/>
+            <a:ext cx="128016" cy="1691640"/>
+          </a:xfrm>
+          <a:prstGeom prst="rect">
+            <a:avLst/>
+          </a:prstGeom>
+          <a:solidFill>
+            <a:srgbClr val="D95323"/>
+          </a:solidFill>
+          <a:ln>
+            <a:noFill/>
+          </a:ln>
+          <a:effectLst/>
+        </p:spPr>
+        <p:style>
+          <a:lnRef idx="1">
+            <a:schemeClr val="accent1"/>
+          </a:lnRef>
+          <a:fillRef idx="3">
+            <a:schemeClr val="accent1"/>
+          </a:fillRef>
+          <a:effectRef idx="2">
+            <a:schemeClr val="accent1"/>
+          </a:effectRef>
+          <a:fontRef idx="minor">
+            <a:schemeClr val="lt1"/>
+          </a:fontRef>
+        </p:style>
+        <p:txBody>
+          <a:bodyPr rtlCol="0" anchor="ctr"/>
+          <a:lstStyle/>
+          <a:p>
+            <a:pPr algn="ctr"/>
+          </a:p>
+        </p:txBody>
+      </p:sp>
+      <p:sp>
+        <p:nvSpPr>
+          <p:cNvPr id="23" name="TextBox 22"/>
+          <p:cNvSpPr txBox="1"/>
+          <p:nvPr/>
+        </p:nvSpPr>
+        <p:spPr>
+          <a:xfrm>
+            <a:off x="6492240" y="4041648"/>
+            <a:ext cx="5120640" cy="1600200"/>
+          </a:xfrm>
+          <a:prstGeom prst="rect">
+            <a:avLst/>
+          </a:prstGeom>
+          <a:noFill/>
+        </p:spPr>
+        <p:txBody>
+          <a:bodyPr wrap="square" anchor="t" lIns="27432" rIns="27432" tIns="9144" bIns="9144">
+            <a:spAutoFit/>
+          </a:bodyPr>
+          <a:lstStyle/>
+          <a:p>
+            <a:pPr algn="l">
+              <a:spcBef>
+                <a:spcPts val="0"/>
+              </a:spcBef>
+              <a:spcAft>
+                <a:spcPts val="500"/>
+              </a:spcAft>
+            </a:pPr>
+            <a:r>
+              <a:rPr sz="1500" b="1" i="0">
+                <a:solidFill>
+                  <a:srgbClr val="D95323"/>
+                </a:solidFill>
+                <a:latin typeface="Tahoma"/>
+              </a:rPr>
+              <a:t>แยกต่อโรงงาน</a:t>
+            </a:r>
+          </a:p>
+          <a:p>
+            <a:pPr algn="l">
+              <a:spcBef>
+                <a:spcPts val="0"/>
+              </a:spcBef>
+              <a:spcAft>
+                <a:spcPts val="500"/>
+              </a:spcAft>
+            </a:pPr>
+            <a:r>
+              <a:rPr sz="1300" b="0" i="0">
+                <a:solidFill>
+                  <a:srgbClr val="0D3D14"/>
+                </a:solidFill>
+                <a:latin typeface="Tahoma"/>
+              </a:rPr>
+              <a:t>•  ข้อมูลผลิต / คน (ด้วย company_id)</a:t>
+            </a:r>
+          </a:p>
+          <a:p>
+            <a:pPr algn="l">
+              <a:spcBef>
+                <a:spcPts val="0"/>
+              </a:spcBef>
+              <a:spcAft>
+                <a:spcPts val="500"/>
+              </a:spcAft>
+            </a:pPr>
+            <a:r>
+              <a:rPr sz="1300" b="0" i="0">
+                <a:solidFill>
+                  <a:srgbClr val="0D3D14"/>
+                </a:solidFill>
+                <a:latin typeface="Tahoma"/>
+              </a:rPr>
+              <a:t>•  ปฏิทิน · เวลาพัก · เป้า KPI · ผังโรงงาน</a:t>
+            </a:r>
+          </a:p>
+          <a:p>
+            <a:pPr algn="l">
+              <a:spcBef>
+                <a:spcPts val="0"/>
+              </a:spcBef>
+              <a:spcAft>
+                <a:spcPts val="500"/>
+              </a:spcAft>
+            </a:pPr>
+            <a:r>
+              <a:rPr sz="1300" b="0" i="0">
+                <a:solidFill>
+                  <a:srgbClr val="0D3D14"/>
+                </a:solidFill>
+                <a:latin typeface="Tahoma"/>
+              </a:rPr>
+              <a:t>•  เลขฟอร์มเอกสาร · ห้อง Telegram</a:t>
+            </a:r>
+          </a:p>
+        </p:txBody>
+      </p:sp>
+      <p:sp>
+        <p:nvSpPr>
+          <p:cNvPr id="24" name="TextBox 23"/>
+          <p:cNvSpPr txBox="1"/>
+          <p:nvPr/>
+        </p:nvSpPr>
+        <p:spPr>
+          <a:xfrm>
+            <a:off x="457200" y="5806440"/>
+            <a:ext cx="11247120" cy="411480"/>
+          </a:xfrm>
+          <a:prstGeom prst="rect">
+            <a:avLst/>
+          </a:prstGeom>
+          <a:noFill/>
+        </p:spPr>
+        <p:txBody>
+          <a:bodyPr wrap="square" anchor="t" lIns="27432" rIns="27432" tIns="9144" bIns="9144">
+            <a:spAutoFit/>
+          </a:bodyPr>
+          <a:lstStyle/>
+          <a:p>
+            <a:pPr algn="l">
+              <a:spcBef>
+                <a:spcPts val="0"/>
+              </a:spcBef>
+              <a:spcAft>
+                <a:spcPts val="200"/>
+              </a:spcAft>
+            </a:pPr>
+            <a:r>
+              <a:rPr sz="1400" b="1" i="0">
+                <a:solidFill>
+                  <a:srgbClr val="D95323"/>
+                </a:solidFill>
+                <a:latin typeface="Tahoma"/>
+              </a:rPr>
+              <a:t>ต้องทำขั้น 2 ก่อนรับโรงงานที่ 2 — ไม่งั้นโรงงานหนึ่งจะมองเห็นข้อมูลของอีกโรงงานได้</a:t>
+            </a:r>
+          </a:p>
+        </p:txBody>
+      </p:sp>
+    </p:spTree>
+  </p:cSld>
+  <p:clrMapOvr>
+    <a:masterClrMapping/>
+  </p:clrMapOvr>
+</p:sld>
+</file>
+
+<file path=ppt/slides/slide7.xml><?xml version="1.0" encoding="utf-8"?>
+<p:sld xmlns:a="http://schemas.openxmlformats.org/drawingml/2006/main" xmlns:p="http://schemas.openxmlformats.org/presentationml/2006/main" xmlns:r="http://schemas.openxmlformats.org/officeDocument/2006/relationships">
+  <p:cSld>
+    <p:spTree>
+      <p:nvGrpSpPr>
+        <p:cNvPr id="1" name=""/>
+        <p:cNvGrpSpPr/>
+        <p:nvPr/>
+      </p:nvGrpSpPr>
+      <p:grpSpPr/>
+      <p:sp>
+        <p:nvSpPr>
+          <p:cNvPr id="2" name="TextBox 1"/>
+          <p:cNvSpPr txBox="1"/>
+          <p:nvPr/>
+        </p:nvSpPr>
+        <p:spPr>
+          <a:xfrm>
+            <a:off x="256032" y="256032"/>
+            <a:ext cx="11430000" cy="649224"/>
+          </a:xfrm>
+          <a:prstGeom prst="rect">
+            <a:avLst/>
+          </a:prstGeom>
+          <a:noFill/>
+        </p:spPr>
+        <p:txBody>
+          <a:bodyPr wrap="square" anchor="t" lIns="27432" rIns="27432" tIns="9144" bIns="9144">
+            <a:spAutoFit/>
+          </a:bodyPr>
+          <a:lstStyle/>
+          <a:p>
+            <a:pPr algn="l">
+              <a:spcBef>
+                <a:spcPts val="0"/>
+              </a:spcBef>
+              <a:spcAft>
+                <a:spcPts val="200"/>
+              </a:spcAft>
+            </a:pPr>
+            <a:r>
+              <a:rPr sz="3600" b="1" i="0">
+                <a:solidFill>
+                  <a:srgbClr val="068734"/>
+                </a:solidFill>
+                <a:latin typeface="Tahoma"/>
+              </a:rPr>
+              <a:t>ขอคำตอบจากไอที + ขั้นต่อไป</a:t>
+            </a:r>
+          </a:p>
+        </p:txBody>
+      </p:sp>
+      <p:pic>
+        <p:nvPicPr>
+          <p:cNvPr id="3" name="Picture 2" descr="logo_r01.png"/>
+          <p:cNvPicPr>
+            <a:picLocks noChangeAspect="1"/>
+          </p:cNvPicPr>
+          <p:nvPr/>
+        </p:nvPicPr>
+        <p:blipFill>
+          <a:blip r:embed="rId2"/>
+          <a:stretch>
+            <a:fillRect/>
+          </a:stretch>
+        </p:blipFill>
+        <p:spPr>
+          <a:xfrm>
+            <a:off x="249631" y="6448348"/>
+            <a:ext cx="237744" cy="237744"/>
+          </a:xfrm>
+          <a:prstGeom prst="rect">
+            <a:avLst/>
+          </a:prstGeom>
+        </p:spPr>
+      </p:pic>
+      <p:sp>
+        <p:nvSpPr>
+          <p:cNvPr id="4" name="TextBox 3"/>
+          <p:cNvSpPr txBox="1"/>
+          <p:nvPr/>
+        </p:nvSpPr>
+        <p:spPr>
+          <a:xfrm>
+            <a:off x="566928" y="6353251"/>
+            <a:ext cx="3246120" cy="400507"/>
           </a:xfrm>
           <a:prstGeom prst="rect">
             <a:avLst/>
@@ -8906,7 +12908,7 @@
           </a:bodyPr>
           <a:lstStyle/>
           <a:p>
-            <a:pPr algn="ctr">
+            <a:pPr algn="l">
               <a:spcBef>
                 <a:spcPts val="0"/>
               </a:spcBef>
@@ -8915,27 +12917,27 @@
               </a:spcAft>
             </a:pPr>
             <a:r>
-              <a:rPr sz="1400" b="1" i="0">
-                <a:solidFill>
-                  <a:srgbClr val="FFFFFF"/>
-                </a:solidFill>
-                <a:latin typeface="Tahoma"/>
-              </a:rPr>
-              <a:t>1</a:t>
-            </a:r>
-          </a:p>
-        </p:txBody>
-      </p:sp>
-      <p:sp>
-        <p:nvSpPr>
-          <p:cNvPr id="10" name="TextBox 9"/>
+              <a:rPr sz="2000" b="1" i="0">
+                <a:solidFill>
+                  <a:srgbClr val="068734"/>
+                </a:solidFill>
+                <a:latin typeface="Tahoma"/>
+              </a:rPr>
+              <a:t>THAI SUMMIT GROUP</a:t>
+            </a:r>
+          </a:p>
+        </p:txBody>
+      </p:sp>
+      <p:sp>
+        <p:nvSpPr>
+          <p:cNvPr id="5" name="TextBox 4"/>
           <p:cNvSpPr txBox="1"/>
           <p:nvPr/>
         </p:nvSpPr>
         <p:spPr>
           <a:xfrm>
-            <a:off x="1234440" y="2057400"/>
-            <a:ext cx="5760720" cy="502920"/>
+            <a:off x="9400032" y="6510528"/>
+            <a:ext cx="2514600" cy="292608"/>
           </a:xfrm>
           <a:prstGeom prst="rect">
             <a:avLst/>
@@ -8943,11 +12945,106 @@
           <a:noFill/>
         </p:spPr>
         <p:txBody>
-          <a:bodyPr wrap="square" anchor="ctr" lIns="27432" rIns="27432" tIns="9144" bIns="9144">
+          <a:bodyPr wrap="square" anchor="t" lIns="27432" rIns="27432" tIns="9144" bIns="9144">
             <a:spAutoFit/>
           </a:bodyPr>
           <a:lstStyle/>
           <a:p>
+            <a:pPr algn="r">
+              <a:spcBef>
+                <a:spcPts val="0"/>
+              </a:spcBef>
+              <a:spcAft>
+                <a:spcPts val="200"/>
+              </a:spcAft>
+            </a:pPr>
+            <a:r>
+              <a:rPr sz="1200" b="0" i="0">
+                <a:solidFill>
+                  <a:srgbClr val="068734"/>
+                </a:solidFill>
+                <a:latin typeface="Tahoma"/>
+              </a:rPr>
+              <a:t>7</a:t>
+            </a:r>
+          </a:p>
+        </p:txBody>
+      </p:sp>
+      <p:sp>
+        <p:nvSpPr>
+          <p:cNvPr id="6" name="Rounded Rectangle 5"/>
+          <p:cNvSpPr/>
+          <p:nvPr/>
+        </p:nvSpPr>
+        <p:spPr>
+          <a:xfrm>
+            <a:off x="457200" y="1463040"/>
+            <a:ext cx="6675120" cy="4434840"/>
+          </a:xfrm>
+          <a:prstGeom prst="roundRect">
+            <a:avLst/>
+          </a:prstGeom>
+          <a:solidFill>
+            <a:srgbClr val="FFFFFF"/>
+          </a:solidFill>
+          <a:ln w="9525">
+            <a:solidFill>
+              <a:srgbClr val="D9D9D9"/>
+            </a:solidFill>
+          </a:ln>
+          <a:effectLst/>
+          <a:effectLst>
+            <a:outerShdw blurRad="50000" dist="20000" dir="5400000" rotWithShape="0">
+              <a:srgbClr val="8A99AD">
+                <a:alpha val="30000"/>
+              </a:srgbClr>
+            </a:outerShdw>
+          </a:effectLst>
+        </p:spPr>
+        <p:style>
+          <a:lnRef idx="1">
+            <a:schemeClr val="accent1"/>
+          </a:lnRef>
+          <a:fillRef idx="3">
+            <a:schemeClr val="accent1"/>
+          </a:fillRef>
+          <a:effectRef idx="2">
+            <a:schemeClr val="accent1"/>
+          </a:effectRef>
+          <a:fontRef idx="minor">
+            <a:schemeClr val="lt1"/>
+          </a:fontRef>
+        </p:style>
+        <p:txBody>
+          <a:bodyPr rtlCol="0" anchor="ctr"/>
+          <a:lstStyle/>
+          <a:p>
+            <a:pPr algn="ctr"/>
+          </a:p>
+        </p:txBody>
+      </p:sp>
+      <p:sp>
+        <p:nvSpPr>
+          <p:cNvPr id="7" name="TextBox 6"/>
+          <p:cNvSpPr txBox="1"/>
+          <p:nvPr/>
+        </p:nvSpPr>
+        <p:spPr>
+          <a:xfrm>
+            <a:off x="685800" y="1554480"/>
+            <a:ext cx="6309360" cy="411480"/>
+          </a:xfrm>
+          <a:prstGeom prst="rect">
+            <a:avLst/>
+          </a:prstGeom>
+          <a:noFill/>
+        </p:spPr>
+        <p:txBody>
+          <a:bodyPr wrap="square" anchor="t" lIns="27432" rIns="27432" tIns="9144" bIns="9144">
+            <a:spAutoFit/>
+          </a:bodyPr>
+          <a:lstStyle/>
+          <a:p>
             <a:pPr algn="l">
               <a:spcBef>
                 <a:spcPts val="0"/>
@@ -8957,26 +13054,26 @@
               </a:spcAft>
             </a:pPr>
             <a:r>
-              <a:rPr sz="1400" b="0" i="0">
+              <a:rPr sz="1700" b="1" i="0">
                 <a:solidFill>
                   <a:srgbClr val="0D3D14"/>
                 </a:solidFill>
                 <a:latin typeface="Tahoma"/>
               </a:rPr>
-              <a:t>มีเครื่องที่รัน Docker ได้ไหม / ใช้ VM ตัวไหน</a:t>
-            </a:r>
-          </a:p>
-        </p:txBody>
-      </p:sp>
-      <p:sp>
-        <p:nvSpPr>
-          <p:cNvPr id="11" name="Oval 10"/>
+              <a:t>คำถามถึงไอที</a:t>
+            </a:r>
+          </a:p>
+        </p:txBody>
+      </p:sp>
+      <p:sp>
+        <p:nvSpPr>
+          <p:cNvPr id="8" name="Oval 7"/>
           <p:cNvSpPr/>
           <p:nvPr/>
         </p:nvSpPr>
         <p:spPr>
           <a:xfrm>
-            <a:off x="685800" y="2734056"/>
+            <a:off x="685800" y="2112264"/>
             <a:ext cx="384048" cy="384048"/>
           </a:xfrm>
           <a:prstGeom prst="ellipse">
@@ -9014,13 +13111,13 @@
       </p:sp>
       <p:sp>
         <p:nvSpPr>
-          <p:cNvPr id="12" name="TextBox 11"/>
+          <p:cNvPr id="9" name="TextBox 8"/>
           <p:cNvSpPr txBox="1"/>
           <p:nvPr/>
         </p:nvSpPr>
         <p:spPr>
           <a:xfrm>
-            <a:off x="685800" y="2734056"/>
+            <a:off x="685800" y="2112264"/>
             <a:ext cx="384048" cy="384048"/>
           </a:xfrm>
           <a:prstGeom prst="rect">
@@ -9049,20 +13146,20 @@
                 </a:solidFill>
                 <a:latin typeface="Tahoma"/>
               </a:rPr>
-              <a:t>2</a:t>
-            </a:r>
-          </a:p>
-        </p:txBody>
-      </p:sp>
-      <p:sp>
-        <p:nvSpPr>
-          <p:cNvPr id="13" name="TextBox 12"/>
+              <a:t>1</a:t>
+            </a:r>
+          </a:p>
+        </p:txBody>
+      </p:sp>
+      <p:sp>
+        <p:nvSpPr>
+          <p:cNvPr id="10" name="TextBox 9"/>
           <p:cNvSpPr txBox="1"/>
           <p:nvPr/>
         </p:nvSpPr>
         <p:spPr>
           <a:xfrm>
-            <a:off x="1234440" y="2679192"/>
+            <a:off x="1234440" y="2057400"/>
             <a:ext cx="5760720" cy="502920"/>
           </a:xfrm>
           <a:prstGeom prst="rect">
@@ -9091,20 +13188,20 @@
                 </a:solidFill>
                 <a:latin typeface="Tahoma"/>
               </a:rPr>
-              <a:t>ใช้เฉพาะในโรงงาน หรือต้องเข้าจากมือถือนอกบริษัทด้วย</a:t>
-            </a:r>
-          </a:p>
-        </p:txBody>
-      </p:sp>
-      <p:sp>
-        <p:nvSpPr>
-          <p:cNvPr id="14" name="Oval 13"/>
+              <a:t>มีเครื่องที่รัน Docker ได้ไหม / ใช้ VM ตัวไหน</a:t>
+            </a:r>
+          </a:p>
+        </p:txBody>
+      </p:sp>
+      <p:sp>
+        <p:nvSpPr>
+          <p:cNvPr id="11" name="Oval 10"/>
           <p:cNvSpPr/>
           <p:nvPr/>
         </p:nvSpPr>
         <p:spPr>
           <a:xfrm>
-            <a:off x="685800" y="3355848"/>
+            <a:off x="685800" y="2734056"/>
             <a:ext cx="384048" cy="384048"/>
           </a:xfrm>
           <a:prstGeom prst="ellipse">
@@ -9142,13 +13239,13 @@
       </p:sp>
       <p:sp>
         <p:nvSpPr>
-          <p:cNvPr id="15" name="TextBox 14"/>
+          <p:cNvPr id="12" name="TextBox 11"/>
           <p:cNvSpPr txBox="1"/>
           <p:nvPr/>
         </p:nvSpPr>
         <p:spPr>
           <a:xfrm>
-            <a:off x="685800" y="3355848"/>
+            <a:off x="685800" y="2734056"/>
             <a:ext cx="384048" cy="384048"/>
           </a:xfrm>
           <a:prstGeom prst="rect">
@@ -9177,20 +13274,20 @@
                 </a:solidFill>
                 <a:latin typeface="Tahoma"/>
               </a:rPr>
-              <a:t>3</a:t>
-            </a:r>
-          </a:p>
-        </p:txBody>
-      </p:sp>
-      <p:sp>
-        <p:nvSpPr>
-          <p:cNvPr id="16" name="TextBox 15"/>
+              <a:t>2</a:t>
+            </a:r>
+          </a:p>
+        </p:txBody>
+      </p:sp>
+      <p:sp>
+        <p:nvSpPr>
+          <p:cNvPr id="13" name="TextBox 12"/>
           <p:cNvSpPr txBox="1"/>
           <p:nvPr/>
         </p:nvSpPr>
         <p:spPr>
           <a:xfrm>
-            <a:off x="1234440" y="3300984"/>
+            <a:off x="1234440" y="2679192"/>
             <a:ext cx="5760720" cy="502920"/>
           </a:xfrm>
           <a:prstGeom prst="rect">
@@ -9219,20 +13316,20 @@
                 </a:solidFill>
                 <a:latin typeface="Tahoma"/>
               </a:rPr>
-              <a:t>มีโดเมนบริษัทให้ใช้ไหม · ใครออกใบรับรอง SSL</a:t>
-            </a:r>
-          </a:p>
-        </p:txBody>
-      </p:sp>
-      <p:sp>
-        <p:nvSpPr>
-          <p:cNvPr id="17" name="Oval 16"/>
+              <a:t>ใช้เฉพาะในโรงงาน หรือต้องเข้าจากมือถือนอกบริษัทด้วย</a:t>
+            </a:r>
+          </a:p>
+        </p:txBody>
+      </p:sp>
+      <p:sp>
+        <p:nvSpPr>
+          <p:cNvPr id="14" name="Oval 13"/>
           <p:cNvSpPr/>
           <p:nvPr/>
         </p:nvSpPr>
         <p:spPr>
           <a:xfrm>
-            <a:off x="685800" y="3977639"/>
+            <a:off x="685800" y="3355848"/>
             <a:ext cx="384048" cy="384048"/>
           </a:xfrm>
           <a:prstGeom prst="ellipse">
@@ -9270,13 +13367,13 @@
       </p:sp>
       <p:sp>
         <p:nvSpPr>
-          <p:cNvPr id="18" name="TextBox 17"/>
+          <p:cNvPr id="15" name="TextBox 14"/>
           <p:cNvSpPr txBox="1"/>
           <p:nvPr/>
         </p:nvSpPr>
         <p:spPr>
           <a:xfrm>
-            <a:off x="685800" y="3977639"/>
+            <a:off x="685800" y="3355848"/>
             <a:ext cx="384048" cy="384048"/>
           </a:xfrm>
           <a:prstGeom prst="rect">
@@ -9305,20 +13402,20 @@
                 </a:solidFill>
                 <a:latin typeface="Tahoma"/>
               </a:rPr>
-              <a:t>4</a:t>
-            </a:r>
-          </a:p>
-        </p:txBody>
-      </p:sp>
-      <p:sp>
-        <p:nvSpPr>
-          <p:cNvPr id="19" name="TextBox 18"/>
+              <a:t>3</a:t>
+            </a:r>
+          </a:p>
+        </p:txBody>
+      </p:sp>
+      <p:sp>
+        <p:nvSpPr>
+          <p:cNvPr id="16" name="TextBox 15"/>
           <p:cNvSpPr txBox="1"/>
           <p:nvPr/>
         </p:nvSpPr>
         <p:spPr>
           <a:xfrm>
-            <a:off x="1234440" y="3922776"/>
+            <a:off x="1234440" y="3300984"/>
             <a:ext cx="5760720" cy="502920"/>
           </a:xfrm>
           <a:prstGeom prst="rect">
@@ -9347,20 +13444,20 @@
                 </a:solidFill>
                 <a:latin typeface="Tahoma"/>
               </a:rPr>
-              <a:t>นโยบาย backup / เก็บข้อมูลของบริษัท</a:t>
-            </a:r>
-          </a:p>
-        </p:txBody>
-      </p:sp>
-      <p:sp>
-        <p:nvSpPr>
-          <p:cNvPr id="20" name="Oval 19"/>
+              <a:t>มีโดเมนบริษัทให้ใช้ไหม · ใครออกใบรับรอง SSL</a:t>
+            </a:r>
+          </a:p>
+        </p:txBody>
+      </p:sp>
+      <p:sp>
+        <p:nvSpPr>
+          <p:cNvPr id="17" name="Oval 16"/>
           <p:cNvSpPr/>
           <p:nvPr/>
         </p:nvSpPr>
         <p:spPr>
           <a:xfrm>
-            <a:off x="685800" y="4599432"/>
+            <a:off x="685800" y="3977639"/>
             <a:ext cx="384048" cy="384048"/>
           </a:xfrm>
           <a:prstGeom prst="ellipse">
@@ -9398,13 +13495,13 @@
       </p:sp>
       <p:sp>
         <p:nvSpPr>
-          <p:cNvPr id="21" name="TextBox 20"/>
+          <p:cNvPr id="18" name="TextBox 17"/>
           <p:cNvSpPr txBox="1"/>
           <p:nvPr/>
         </p:nvSpPr>
         <p:spPr>
           <a:xfrm>
-            <a:off x="685800" y="4599432"/>
+            <a:off x="685800" y="3977639"/>
             <a:ext cx="384048" cy="384048"/>
           </a:xfrm>
           <a:prstGeom prst="rect">
@@ -9433,20 +13530,20 @@
                 </a:solidFill>
                 <a:latin typeface="Tahoma"/>
               </a:rPr>
-              <a:t>5</a:t>
-            </a:r>
-          </a:p>
-        </p:txBody>
-      </p:sp>
-      <p:sp>
-        <p:nvSpPr>
-          <p:cNvPr id="22" name="TextBox 21"/>
+              <a:t>4</a:t>
+            </a:r>
+          </a:p>
+        </p:txBody>
+      </p:sp>
+      <p:sp>
+        <p:nvSpPr>
+          <p:cNvPr id="19" name="TextBox 18"/>
           <p:cNvSpPr txBox="1"/>
           <p:nvPr/>
         </p:nvSpPr>
         <p:spPr>
           <a:xfrm>
-            <a:off x="1234440" y="4544568"/>
+            <a:off x="1234440" y="3922776"/>
             <a:ext cx="5760720" cy="502920"/>
           </a:xfrm>
           <a:prstGeom prst="rect">
@@ -9475,20 +13572,20 @@
                 </a:solidFill>
                 <a:latin typeface="Tahoma"/>
               </a:rPr>
-              <a:t>ใครเป็นผู้ดูแลเครื่อง · ใครได้สิทธิ์ admin</a:t>
-            </a:r>
-          </a:p>
-        </p:txBody>
-      </p:sp>
-      <p:sp>
-        <p:nvSpPr>
-          <p:cNvPr id="23" name="Oval 22"/>
+              <a:t>นโยบาย backup / เก็บข้อมูลของบริษัท</a:t>
+            </a:r>
+          </a:p>
+        </p:txBody>
+      </p:sp>
+      <p:sp>
+        <p:nvSpPr>
+          <p:cNvPr id="20" name="Oval 19"/>
           <p:cNvSpPr/>
           <p:nvPr/>
         </p:nvSpPr>
         <p:spPr>
           <a:xfrm>
-            <a:off x="685800" y="5221224"/>
+            <a:off x="685800" y="4599432"/>
             <a:ext cx="384048" cy="384048"/>
           </a:xfrm>
           <a:prstGeom prst="ellipse">
@@ -9526,6 +13623,134 @@
       </p:sp>
       <p:sp>
         <p:nvSpPr>
+          <p:cNvPr id="21" name="TextBox 20"/>
+          <p:cNvSpPr txBox="1"/>
+          <p:nvPr/>
+        </p:nvSpPr>
+        <p:spPr>
+          <a:xfrm>
+            <a:off x="685800" y="4599432"/>
+            <a:ext cx="384048" cy="384048"/>
+          </a:xfrm>
+          <a:prstGeom prst="rect">
+            <a:avLst/>
+          </a:prstGeom>
+          <a:noFill/>
+        </p:spPr>
+        <p:txBody>
+          <a:bodyPr wrap="square" anchor="ctr" lIns="27432" rIns="27432" tIns="9144" bIns="9144">
+            <a:spAutoFit/>
+          </a:bodyPr>
+          <a:lstStyle/>
+          <a:p>
+            <a:pPr algn="ctr">
+              <a:spcBef>
+                <a:spcPts val="0"/>
+              </a:spcBef>
+              <a:spcAft>
+                <a:spcPts val="200"/>
+              </a:spcAft>
+            </a:pPr>
+            <a:r>
+              <a:rPr sz="1400" b="1" i="0">
+                <a:solidFill>
+                  <a:srgbClr val="FFFFFF"/>
+                </a:solidFill>
+                <a:latin typeface="Tahoma"/>
+              </a:rPr>
+              <a:t>5</a:t>
+            </a:r>
+          </a:p>
+        </p:txBody>
+      </p:sp>
+      <p:sp>
+        <p:nvSpPr>
+          <p:cNvPr id="22" name="TextBox 21"/>
+          <p:cNvSpPr txBox="1"/>
+          <p:nvPr/>
+        </p:nvSpPr>
+        <p:spPr>
+          <a:xfrm>
+            <a:off x="1234440" y="4544568"/>
+            <a:ext cx="5760720" cy="502920"/>
+          </a:xfrm>
+          <a:prstGeom prst="rect">
+            <a:avLst/>
+          </a:prstGeom>
+          <a:noFill/>
+        </p:spPr>
+        <p:txBody>
+          <a:bodyPr wrap="square" anchor="ctr" lIns="27432" rIns="27432" tIns="9144" bIns="9144">
+            <a:spAutoFit/>
+          </a:bodyPr>
+          <a:lstStyle/>
+          <a:p>
+            <a:pPr algn="l">
+              <a:spcBef>
+                <a:spcPts val="0"/>
+              </a:spcBef>
+              <a:spcAft>
+                <a:spcPts val="200"/>
+              </a:spcAft>
+            </a:pPr>
+            <a:r>
+              <a:rPr sz="1400" b="0" i="0">
+                <a:solidFill>
+                  <a:srgbClr val="0D3D14"/>
+                </a:solidFill>
+                <a:latin typeface="Tahoma"/>
+              </a:rPr>
+              <a:t>ใครเป็นผู้ดูแลเครื่อง · ใครได้สิทธิ์ admin</a:t>
+            </a:r>
+          </a:p>
+        </p:txBody>
+      </p:sp>
+      <p:sp>
+        <p:nvSpPr>
+          <p:cNvPr id="23" name="Oval 22"/>
+          <p:cNvSpPr/>
+          <p:nvPr/>
+        </p:nvSpPr>
+        <p:spPr>
+          <a:xfrm>
+            <a:off x="685800" y="5221224"/>
+            <a:ext cx="384048" cy="384048"/>
+          </a:xfrm>
+          <a:prstGeom prst="ellipse">
+            <a:avLst/>
+          </a:prstGeom>
+          <a:solidFill>
+            <a:srgbClr val="068734"/>
+          </a:solidFill>
+          <a:ln>
+            <a:noFill/>
+          </a:ln>
+          <a:effectLst/>
+        </p:spPr>
+        <p:style>
+          <a:lnRef idx="1">
+            <a:schemeClr val="accent1"/>
+          </a:lnRef>
+          <a:fillRef idx="3">
+            <a:schemeClr val="accent1"/>
+          </a:fillRef>
+          <a:effectRef idx="2">
+            <a:schemeClr val="accent1"/>
+          </a:effectRef>
+          <a:fontRef idx="minor">
+            <a:schemeClr val="lt1"/>
+          </a:fontRef>
+        </p:style>
+        <p:txBody>
+          <a:bodyPr rtlCol="0" anchor="ctr"/>
+          <a:lstStyle/>
+          <a:p>
+            <a:pPr algn="ctr"/>
+          </a:p>
+        </p:txBody>
+      </p:sp>
+      <p:sp>
+        <p:nvSpPr>
           <p:cNvPr id="24" name="TextBox 23"/>
           <p:cNvSpPr txBox="1"/>
           <p:nvPr/>
@@ -9708,7 +13933,7 @@
                 </a:solidFill>
                 <a:latin typeface="Tahoma"/>
               </a:rPr>
-              <a:t>•  ไอทีเลือกทาง A / B</a:t>
+              <a:t>•  ยืนยันผังไอที + ตอบคำถามข้างซ้าย</a:t>
             </a:r>
           </a:p>
           <a:p>
